--- a/public/prints/kanji-no-yomi.pptx
+++ b/public/prints/kanji-no-yomi.pptx
@@ -104,6 +104,11 @@
       </a:defRPr>
     </a:lvl9pPr>
   </p:defaultTextStyle>
+  <p:extLst>
+    <p:ext uri="{EFAFB233-063F-42B5-8137-9DF3F51BA10A}">
+      <p15:sldGuideLst xmlns:p15="http://schemas.microsoft.com/office/powerpoint/2012/main"/>
+    </p:ext>
+  </p:extLst>
 </p:presentation>
 </file>
 
@@ -238,7 +243,7 @@
           <a:p>
             <a:fld id="{688B90AB-67C6-40B7-9CB8-7949EC90E7F5}" type="datetimeFigureOut">
               <a:rPr kumimoji="1" lang="ja-JP" altLang="en-US" smtClean="0"/>
-              <a:t>2025/6/22</a:t>
+              <a:t>2026/1/24</a:t>
             </a:fld>
             <a:endParaRPr kumimoji="1" lang="ja-JP" altLang="en-US"/>
           </a:p>
@@ -440,7 +445,7 @@
           <a:p>
             <a:fld id="{688B90AB-67C6-40B7-9CB8-7949EC90E7F5}" type="datetimeFigureOut">
               <a:rPr kumimoji="1" lang="ja-JP" altLang="en-US" smtClean="0"/>
-              <a:t>2025/6/22</a:t>
+              <a:t>2026/1/24</a:t>
             </a:fld>
             <a:endParaRPr kumimoji="1" lang="ja-JP" altLang="en-US"/>
           </a:p>
@@ -652,7 +657,7 @@
           <a:p>
             <a:fld id="{688B90AB-67C6-40B7-9CB8-7949EC90E7F5}" type="datetimeFigureOut">
               <a:rPr kumimoji="1" lang="ja-JP" altLang="en-US" smtClean="0"/>
-              <a:t>2025/6/22</a:t>
+              <a:t>2026/1/24</a:t>
             </a:fld>
             <a:endParaRPr kumimoji="1" lang="ja-JP" altLang="en-US"/>
           </a:p>
@@ -854,7 +859,7 @@
           <a:p>
             <a:fld id="{688B90AB-67C6-40B7-9CB8-7949EC90E7F5}" type="datetimeFigureOut">
               <a:rPr kumimoji="1" lang="ja-JP" altLang="en-US" smtClean="0"/>
-              <a:t>2025/6/22</a:t>
+              <a:t>2026/1/24</a:t>
             </a:fld>
             <a:endParaRPr kumimoji="1" lang="ja-JP" altLang="en-US"/>
           </a:p>
@@ -1098,7 +1103,7 @@
           <a:p>
             <a:fld id="{688B90AB-67C6-40B7-9CB8-7949EC90E7F5}" type="datetimeFigureOut">
               <a:rPr kumimoji="1" lang="ja-JP" altLang="en-US" smtClean="0"/>
-              <a:t>2025/6/22</a:t>
+              <a:t>2026/1/24</a:t>
             </a:fld>
             <a:endParaRPr kumimoji="1" lang="ja-JP" altLang="en-US"/>
           </a:p>
@@ -1394,7 +1399,7 @@
           <a:p>
             <a:fld id="{688B90AB-67C6-40B7-9CB8-7949EC90E7F5}" type="datetimeFigureOut">
               <a:rPr kumimoji="1" lang="ja-JP" altLang="en-US" smtClean="0"/>
-              <a:t>2025/6/22</a:t>
+              <a:t>2026/1/24</a:t>
             </a:fld>
             <a:endParaRPr kumimoji="1" lang="ja-JP" altLang="en-US"/>
           </a:p>
@@ -1825,7 +1830,7 @@
           <a:p>
             <a:fld id="{688B90AB-67C6-40B7-9CB8-7949EC90E7F5}" type="datetimeFigureOut">
               <a:rPr kumimoji="1" lang="ja-JP" altLang="en-US" smtClean="0"/>
-              <a:t>2025/6/22</a:t>
+              <a:t>2026/1/24</a:t>
             </a:fld>
             <a:endParaRPr kumimoji="1" lang="ja-JP" altLang="en-US"/>
           </a:p>
@@ -1943,7 +1948,7 @@
           <a:p>
             <a:fld id="{688B90AB-67C6-40B7-9CB8-7949EC90E7F5}" type="datetimeFigureOut">
               <a:rPr kumimoji="1" lang="ja-JP" altLang="en-US" smtClean="0"/>
-              <a:t>2025/6/22</a:t>
+              <a:t>2026/1/24</a:t>
             </a:fld>
             <a:endParaRPr kumimoji="1" lang="ja-JP" altLang="en-US"/>
           </a:p>
@@ -2038,7 +2043,7 @@
           <a:p>
             <a:fld id="{688B90AB-67C6-40B7-9CB8-7949EC90E7F5}" type="datetimeFigureOut">
               <a:rPr kumimoji="1" lang="ja-JP" altLang="en-US" smtClean="0"/>
-              <a:t>2025/6/22</a:t>
+              <a:t>2026/1/24</a:t>
             </a:fld>
             <a:endParaRPr kumimoji="1" lang="ja-JP" altLang="en-US"/>
           </a:p>
@@ -2347,7 +2352,7 @@
           <a:p>
             <a:fld id="{688B90AB-67C6-40B7-9CB8-7949EC90E7F5}" type="datetimeFigureOut">
               <a:rPr kumimoji="1" lang="ja-JP" altLang="en-US" smtClean="0"/>
-              <a:t>2025/6/22</a:t>
+              <a:t>2026/1/24</a:t>
             </a:fld>
             <a:endParaRPr kumimoji="1" lang="ja-JP" altLang="en-US"/>
           </a:p>
@@ -2604,7 +2609,7 @@
           <a:p>
             <a:fld id="{688B90AB-67C6-40B7-9CB8-7949EC90E7F5}" type="datetimeFigureOut">
               <a:rPr kumimoji="1" lang="ja-JP" altLang="en-US" smtClean="0"/>
-              <a:t>2025/6/22</a:t>
+              <a:t>2026/1/24</a:t>
             </a:fld>
             <a:endParaRPr kumimoji="1" lang="ja-JP" altLang="en-US"/>
           </a:p>
@@ -2849,7 +2854,7 @@
           <a:p>
             <a:fld id="{688B90AB-67C6-40B7-9CB8-7949EC90E7F5}" type="datetimeFigureOut">
               <a:rPr kumimoji="1" lang="ja-JP" altLang="en-US" smtClean="0"/>
-              <a:t>2025/6/22</a:t>
+              <a:t>2026/1/24</a:t>
             </a:fld>
             <a:endParaRPr kumimoji="1" lang="ja-JP" altLang="en-US"/>
           </a:p>
@@ -3315,8 +3320,8 @@
         </p:nvSpPr>
         <p:spPr>
           <a:xfrm>
-            <a:off x="1852093" y="153279"/>
-            <a:ext cx="6955750" cy="2846292"/>
+            <a:off x="3237087" y="153279"/>
+            <a:ext cx="5570756" cy="2846292"/>
           </a:xfrm>
           <a:prstGeom prst="rect">
             <a:avLst/>
@@ -3352,7 +3357,7 @@
               <a:rPr kumimoji="1" lang="ja-JP" altLang="en-US" sz="2000" dirty="0"/>
               <a:t>はプールです。</a:t>
             </a:r>
-            <a:endParaRPr kumimoji="1" lang="en-US" altLang="ja-JP" sz="2000" dirty="0"/>
+            <a:endParaRPr kumimoji="1" lang="en-US" altLang="ja-JP" sz="900" dirty="0"/>
           </a:p>
           <a:p>
             <a:pPr>
@@ -3360,6 +3365,24 @@
                 <a:spcPct val="250000"/>
               </a:lnSpc>
             </a:pPr>
+            <a:r>
+              <a:rPr kumimoji="1" lang="en-US" altLang="ja-JP" sz="2000" dirty="0"/>
+              <a:t>   (                                          )</a:t>
+            </a:r>
+          </a:p>
+          <a:p>
+            <a:r>
+              <a:rPr kumimoji="1" lang="ja-JP" altLang="en-US" sz="2000" dirty="0"/>
+              <a:t>②</a:t>
+            </a:r>
+            <a:r>
+              <a:rPr kumimoji="1" lang="ja-JP" altLang="en-US" sz="2000" b="1" u="sng" dirty="0"/>
+              <a:t>月</a:t>
+            </a:r>
+            <a:r>
+              <a:rPr kumimoji="1" lang="ja-JP" altLang="en-US" sz="2000" dirty="0"/>
+              <a:t>ようびです。</a:t>
+            </a:r>
             <a:endParaRPr kumimoji="1" lang="en-US" altLang="ja-JP" sz="900" dirty="0"/>
           </a:p>
           <a:p>
@@ -3376,17 +3399,17 @@
           <a:p>
             <a:r>
               <a:rPr kumimoji="1" lang="ja-JP" altLang="en-US" sz="2000" dirty="0"/>
-              <a:t>②</a:t>
+              <a:t>③</a:t>
             </a:r>
             <a:r>
               <a:rPr kumimoji="1" lang="ja-JP" altLang="en-US" sz="2000" b="1" u="sng" dirty="0"/>
-              <a:t>月</a:t>
+              <a:t>学校</a:t>
             </a:r>
             <a:r>
               <a:rPr kumimoji="1" lang="ja-JP" altLang="en-US" sz="2000" dirty="0"/>
-              <a:t>ようびです。</a:t>
-            </a:r>
-            <a:endParaRPr kumimoji="1" lang="en-US" altLang="ja-JP" sz="2000" dirty="0"/>
+              <a:t>にいきました。</a:t>
+            </a:r>
+            <a:endParaRPr kumimoji="1" lang="en-US" altLang="ja-JP" sz="900" dirty="0"/>
           </a:p>
           <a:p>
             <a:pPr>
@@ -3394,14 +3417,6 @@
                 <a:spcPct val="250000"/>
               </a:lnSpc>
             </a:pPr>
-            <a:endParaRPr kumimoji="1" lang="en-US" altLang="ja-JP" sz="900" dirty="0"/>
-          </a:p>
-          <a:p>
-            <a:pPr>
-              <a:lnSpc>
-                <a:spcPct val="250000"/>
-              </a:lnSpc>
-            </a:pPr>
             <a:r>
               <a:rPr kumimoji="1" lang="en-US" altLang="ja-JP" sz="2000" dirty="0"/>
               <a:t>   (                                          )</a:t>
@@ -3410,40 +3425,6 @@
           <a:p>
             <a:r>
               <a:rPr kumimoji="1" lang="ja-JP" altLang="en-US" sz="2000" dirty="0"/>
-              <a:t>③</a:t>
-            </a:r>
-            <a:r>
-              <a:rPr kumimoji="1" lang="ja-JP" altLang="en-US" sz="2000" b="1" u="sng" dirty="0"/>
-              <a:t>学校</a:t>
-            </a:r>
-            <a:r>
-              <a:rPr kumimoji="1" lang="ja-JP" altLang="en-US" sz="2000" dirty="0"/>
-              <a:t>にいきました。</a:t>
-            </a:r>
-            <a:endParaRPr kumimoji="1" lang="en-US" altLang="ja-JP" sz="2000" dirty="0"/>
-          </a:p>
-          <a:p>
-            <a:pPr>
-              <a:lnSpc>
-                <a:spcPct val="250000"/>
-              </a:lnSpc>
-            </a:pPr>
-            <a:endParaRPr kumimoji="1" lang="en-US" altLang="ja-JP" sz="900" dirty="0"/>
-          </a:p>
-          <a:p>
-            <a:pPr>
-              <a:lnSpc>
-                <a:spcPct val="250000"/>
-              </a:lnSpc>
-            </a:pPr>
-            <a:r>
-              <a:rPr kumimoji="1" lang="en-US" altLang="ja-JP" sz="2000" dirty="0"/>
-              <a:t>   (                                          )</a:t>
-            </a:r>
-          </a:p>
-          <a:p>
-            <a:r>
-              <a:rPr kumimoji="1" lang="ja-JP" altLang="en-US" sz="2000" dirty="0"/>
               <a:t>④</a:t>
             </a:r>
             <a:r>
@@ -3454,14 +3435,6 @@
               <a:rPr kumimoji="1" lang="ja-JP" altLang="en-US" sz="2000" dirty="0"/>
               <a:t>のなかにはいる。</a:t>
             </a:r>
-            <a:endParaRPr kumimoji="1" lang="en-US" altLang="ja-JP" sz="2000" dirty="0"/>
-          </a:p>
-          <a:p>
-            <a:pPr>
-              <a:lnSpc>
-                <a:spcPct val="250000"/>
-              </a:lnSpc>
-            </a:pPr>
             <a:endParaRPr kumimoji="1" lang="en-US" altLang="ja-JP" sz="900" dirty="0"/>
           </a:p>
           <a:p>
@@ -3506,8 +3479,8 @@
         </p:nvSpPr>
         <p:spPr>
           <a:xfrm>
-            <a:off x="1852093" y="3421481"/>
-            <a:ext cx="6955750" cy="3426579"/>
+            <a:off x="3237087" y="3421481"/>
+            <a:ext cx="5570756" cy="3426579"/>
           </a:xfrm>
           <a:prstGeom prst="rect">
             <a:avLst/>
@@ -3543,7 +3516,7 @@
               <a:rPr kumimoji="1" lang="ja-JP" altLang="en-US" sz="2000" dirty="0"/>
               <a:t>。</a:t>
             </a:r>
-            <a:endParaRPr kumimoji="1" lang="en-US" altLang="ja-JP" sz="2000" dirty="0"/>
+            <a:endParaRPr kumimoji="1" lang="en-US" altLang="ja-JP" sz="900" dirty="0"/>
           </a:p>
           <a:p>
             <a:pPr>
@@ -3551,6 +3524,24 @@
                 <a:spcPct val="250000"/>
               </a:lnSpc>
             </a:pPr>
+            <a:r>
+              <a:rPr kumimoji="1" lang="en-US" altLang="ja-JP" sz="2000" dirty="0"/>
+              <a:t>   (                                          )</a:t>
+            </a:r>
+          </a:p>
+          <a:p>
+            <a:r>
+              <a:rPr kumimoji="1" lang="ja-JP" altLang="en-US" sz="2000" dirty="0"/>
+              <a:t>⑦</a:t>
+            </a:r>
+            <a:r>
+              <a:rPr kumimoji="1" lang="ja-JP" altLang="en-US" sz="2000" b="1" u="sng" dirty="0"/>
+              <a:t>虫</a:t>
+            </a:r>
+            <a:r>
+              <a:rPr kumimoji="1" lang="ja-JP" altLang="en-US" sz="2000" dirty="0"/>
+              <a:t>をつかまえる。</a:t>
+            </a:r>
             <a:endParaRPr kumimoji="1" lang="en-US" altLang="ja-JP" sz="900" dirty="0"/>
           </a:p>
           <a:p>
@@ -3567,17 +3558,17 @@
           <a:p>
             <a:r>
               <a:rPr kumimoji="1" lang="ja-JP" altLang="en-US" sz="2000" dirty="0"/>
-              <a:t>⑦</a:t>
+              <a:t>⑧きゅうしょくの</a:t>
             </a:r>
             <a:r>
               <a:rPr kumimoji="1" lang="ja-JP" altLang="en-US" sz="2000" b="1" u="sng" dirty="0"/>
-              <a:t>虫</a:t>
+              <a:t>時間</a:t>
             </a:r>
             <a:r>
               <a:rPr kumimoji="1" lang="ja-JP" altLang="en-US" sz="2000" dirty="0"/>
-              <a:t>をつかまえる。</a:t>
-            </a:r>
-            <a:endParaRPr kumimoji="1" lang="en-US" altLang="ja-JP" sz="2000" dirty="0"/>
+              <a:t>です。</a:t>
+            </a:r>
+            <a:endParaRPr kumimoji="1" lang="en-US" altLang="ja-JP" sz="900" dirty="0"/>
           </a:p>
           <a:p>
             <a:pPr>
@@ -3585,14 +3576,6 @@
                 <a:spcPct val="250000"/>
               </a:lnSpc>
             </a:pPr>
-            <a:endParaRPr kumimoji="1" lang="en-US" altLang="ja-JP" sz="900" dirty="0"/>
-          </a:p>
-          <a:p>
-            <a:pPr>
-              <a:lnSpc>
-                <a:spcPct val="250000"/>
-              </a:lnSpc>
-            </a:pPr>
             <a:r>
               <a:rPr kumimoji="1" lang="en-US" altLang="ja-JP" sz="2000" dirty="0"/>
               <a:t>   (                                          )</a:t>
@@ -3601,40 +3584,6 @@
           <a:p>
             <a:r>
               <a:rPr kumimoji="1" lang="ja-JP" altLang="en-US" sz="2000" dirty="0"/>
-              <a:t>⑧きゅうしょくの</a:t>
-            </a:r>
-            <a:r>
-              <a:rPr kumimoji="1" lang="ja-JP" altLang="en-US" sz="2000" b="1" u="sng" dirty="0"/>
-              <a:t>時間</a:t>
-            </a:r>
-            <a:r>
-              <a:rPr kumimoji="1" lang="ja-JP" altLang="en-US" sz="2000" dirty="0"/>
-              <a:t>です。</a:t>
-            </a:r>
-            <a:endParaRPr kumimoji="1" lang="en-US" altLang="ja-JP" sz="2000" dirty="0"/>
-          </a:p>
-          <a:p>
-            <a:pPr>
-              <a:lnSpc>
-                <a:spcPct val="250000"/>
-              </a:lnSpc>
-            </a:pPr>
-            <a:endParaRPr kumimoji="1" lang="en-US" altLang="ja-JP" sz="900" dirty="0"/>
-          </a:p>
-          <a:p>
-            <a:pPr>
-              <a:lnSpc>
-                <a:spcPct val="250000"/>
-              </a:lnSpc>
-            </a:pPr>
-            <a:r>
-              <a:rPr kumimoji="1" lang="en-US" altLang="ja-JP" sz="2000" dirty="0"/>
-              <a:t>   (                                          )</a:t>
-            </a:r>
-          </a:p>
-          <a:p>
-            <a:r>
-              <a:rPr kumimoji="1" lang="ja-JP" altLang="en-US" sz="2000" dirty="0"/>
               <a:t>⑨ねこの</a:t>
             </a:r>
             <a:r>
@@ -3645,14 +3594,6 @@
               <a:rPr kumimoji="1" lang="ja-JP" altLang="en-US" sz="2000" dirty="0"/>
               <a:t>をさわる。</a:t>
             </a:r>
-            <a:endParaRPr kumimoji="1" lang="en-US" altLang="ja-JP" sz="2000" dirty="0"/>
-          </a:p>
-          <a:p>
-            <a:pPr>
-              <a:lnSpc>
-                <a:spcPct val="250000"/>
-              </a:lnSpc>
-            </a:pPr>
             <a:endParaRPr kumimoji="1" lang="en-US" altLang="ja-JP" sz="900" dirty="0"/>
           </a:p>
           <a:p>
@@ -3699,8 +3640,8 @@
         </p:nvCxnSpPr>
         <p:spPr>
           <a:xfrm>
-            <a:off x="1838645" y="3255634"/>
-            <a:ext cx="6592660" cy="0"/>
+            <a:off x="3211144" y="3255634"/>
+            <a:ext cx="5220161" cy="0"/>
           </a:xfrm>
           <a:prstGeom prst="line">
             <a:avLst/>
@@ -3742,7 +3683,7 @@
         </p:nvCxnSpPr>
         <p:spPr>
           <a:xfrm flipV="1">
-            <a:off x="1834163" y="153279"/>
+            <a:off x="3211144" y="148227"/>
             <a:ext cx="0" cy="6536405"/>
           </a:xfrm>
           <a:prstGeom prst="line">
@@ -3784,14 +3725,14 @@
           <p:nvPr>
             <p:extLst>
               <p:ext uri="{D42A27DB-BD31-4B8C-83A1-F6EECF244321}">
-                <p14:modId xmlns:p14="http://schemas.microsoft.com/office/powerpoint/2010/main" val="1020484018"/>
+                <p14:modId xmlns:p14="http://schemas.microsoft.com/office/powerpoint/2010/main" val="609480820"/>
               </p:ext>
             </p:extLst>
           </p:nvPr>
         </p:nvGraphicFramePr>
         <p:xfrm>
-          <a:off x="134449" y="45310"/>
-          <a:ext cx="1474692" cy="6767380"/>
+          <a:off x="1918446" y="50181"/>
+          <a:ext cx="922459" cy="6767380"/>
         </p:xfrm>
         <a:graphic>
           <a:graphicData uri="http://schemas.openxmlformats.org/drawingml/2006/table">
@@ -3800,14 +3741,14 @@
                 <a:tableStyleId>{5C22544A-7EE6-4342-B048-85BDC9FD1C3A}</a:tableStyleId>
               </a:tblPr>
               <a:tblGrid>
-                <a:gridCol w="737346">
+                <a:gridCol w="709934">
                   <a:extLst>
                     <a:ext uri="{9D8B030D-6E8A-4147-A177-3AD203B41FA5}">
                       <a16:colId xmlns:a16="http://schemas.microsoft.com/office/drawing/2014/main" val="1713360762"/>
                     </a:ext>
                   </a:extLst>
                 </a:gridCol>
-                <a:gridCol w="737346">
+                <a:gridCol w="212525">
                   <a:extLst>
                     <a:ext uri="{9D8B030D-6E8A-4147-A177-3AD203B41FA5}">
                       <a16:colId xmlns:a16="http://schemas.microsoft.com/office/drawing/2014/main" val="2680084964"/>
@@ -3871,7 +3812,7 @@
                     <a:bodyPr/>
                     <a:lstStyle/>
                     <a:p>
-                      <a:endParaRPr kumimoji="1" lang="ja-JP" altLang="en-US"/>
+                      <a:endParaRPr kumimoji="1" lang="ja-JP" altLang="en-US" dirty="0"/>
                     </a:p>
                   </a:txBody>
                   <a:tcPr>
@@ -3928,7 +3869,7 @@
                     <a:bodyPr/>
                     <a:lstStyle/>
                     <a:p>
-                      <a:endParaRPr kumimoji="1" lang="ja-JP" altLang="en-US"/>
+                      <a:endParaRPr kumimoji="1" lang="ja-JP" altLang="en-US" dirty="0"/>
                     </a:p>
                   </a:txBody>
                   <a:tcPr>
@@ -3978,7 +3919,7 @@
                     <a:bodyPr/>
                     <a:lstStyle/>
                     <a:p>
-                      <a:endParaRPr kumimoji="1" lang="ja-JP" altLang="en-US"/>
+                      <a:endParaRPr kumimoji="1" lang="ja-JP" altLang="en-US" dirty="0"/>
                     </a:p>
                   </a:txBody>
                   <a:tcPr>
@@ -4035,7 +3976,7 @@
                     <a:bodyPr/>
                     <a:lstStyle/>
                     <a:p>
-                      <a:endParaRPr kumimoji="1" lang="ja-JP" altLang="en-US"/>
+                      <a:endParaRPr kumimoji="1" lang="ja-JP" altLang="en-US" dirty="0"/>
                     </a:p>
                   </a:txBody>
                   <a:tcPr>
@@ -4085,7 +4026,7 @@
                     <a:bodyPr/>
                     <a:lstStyle/>
                     <a:p>
-                      <a:endParaRPr kumimoji="1" lang="ja-JP" altLang="en-US"/>
+                      <a:endParaRPr kumimoji="1" lang="ja-JP" altLang="en-US" dirty="0"/>
                     </a:p>
                   </a:txBody>
                   <a:tcPr>
@@ -4142,7 +4083,7 @@
                     <a:bodyPr/>
                     <a:lstStyle/>
                     <a:p>
-                      <a:endParaRPr kumimoji="1" lang="ja-JP" altLang="en-US"/>
+                      <a:endParaRPr kumimoji="1" lang="ja-JP" altLang="en-US" dirty="0"/>
                     </a:p>
                   </a:txBody>
                   <a:tcPr>
@@ -4192,7 +4133,7 @@
                     <a:bodyPr/>
                     <a:lstStyle/>
                     <a:p>
-                      <a:endParaRPr kumimoji="1" lang="ja-JP" altLang="en-US"/>
+                      <a:endParaRPr kumimoji="1" lang="ja-JP" altLang="en-US" dirty="0"/>
                     </a:p>
                   </a:txBody>
                   <a:tcPr>
@@ -4299,7 +4240,7 @@
                     <a:bodyPr/>
                     <a:lstStyle/>
                     <a:p>
-                      <a:endParaRPr kumimoji="1" lang="ja-JP" altLang="en-US"/>
+                      <a:endParaRPr kumimoji="1" lang="ja-JP" altLang="en-US" dirty="0"/>
                     </a:p>
                   </a:txBody>
                   <a:tcPr>
@@ -4784,7 +4725,7 @@
                     <a:bodyPr/>
                     <a:lstStyle/>
                     <a:p>
-                      <a:endParaRPr kumimoji="1" lang="ja-JP" altLang="en-US"/>
+                      <a:endParaRPr kumimoji="1" lang="ja-JP" altLang="en-US" dirty="0"/>
                     </a:p>
                   </a:txBody>
                   <a:tcPr>
@@ -4889,6 +4830,2281 @@
           </a:graphicData>
         </a:graphic>
       </p:graphicFrame>
+      <p:graphicFrame>
+        <p:nvGraphicFramePr>
+          <p:cNvPr id="3" name="表 2">
+            <a:extLst>
+              <a:ext uri="{FF2B5EF4-FFF2-40B4-BE49-F238E27FC236}">
+                <a16:creationId xmlns:a16="http://schemas.microsoft.com/office/drawing/2014/main" id="{6A979F62-E518-FB7E-FB7D-2CD99EDC6465}"/>
+              </a:ext>
+            </a:extLst>
+          </p:cNvPr>
+          <p:cNvGraphicFramePr>
+            <a:graphicFrameLocks noGrp="1"/>
+          </p:cNvGraphicFramePr>
+          <p:nvPr>
+            <p:extLst>
+              <p:ext uri="{D42A27DB-BD31-4B8C-83A1-F6EECF244321}">
+                <p14:modId xmlns:p14="http://schemas.microsoft.com/office/powerpoint/2010/main" val="1307912211"/>
+              </p:ext>
+            </p:extLst>
+          </p:nvPr>
+        </p:nvGraphicFramePr>
+        <p:xfrm>
+          <a:off x="995986" y="51627"/>
+          <a:ext cx="922459" cy="6767380"/>
+        </p:xfrm>
+        <a:graphic>
+          <a:graphicData uri="http://schemas.openxmlformats.org/drawingml/2006/table">
+            <a:tbl>
+              <a:tblPr firstRow="1" bandRow="1">
+                <a:tableStyleId>{5C22544A-7EE6-4342-B048-85BDC9FD1C3A}</a:tableStyleId>
+              </a:tblPr>
+              <a:tblGrid>
+                <a:gridCol w="709934">
+                  <a:extLst>
+                    <a:ext uri="{9D8B030D-6E8A-4147-A177-3AD203B41FA5}">
+                      <a16:colId xmlns:a16="http://schemas.microsoft.com/office/drawing/2014/main" val="1713360762"/>
+                    </a:ext>
+                  </a:extLst>
+                </a:gridCol>
+                <a:gridCol w="212525">
+                  <a:extLst>
+                    <a:ext uri="{9D8B030D-6E8A-4147-A177-3AD203B41FA5}">
+                      <a16:colId xmlns:a16="http://schemas.microsoft.com/office/drawing/2014/main" val="2680084964"/>
+                    </a:ext>
+                  </a:extLst>
+                </a:gridCol>
+              </a:tblGrid>
+              <a:tr h="676738">
+                <a:tc>
+                  <a:txBody>
+                    <a:bodyPr/>
+                    <a:lstStyle/>
+                    <a:p>
+                      <a:endParaRPr kumimoji="1" lang="ja-JP" altLang="en-US"/>
+                    </a:p>
+                  </a:txBody>
+                  <a:tcPr>
+                    <a:lnL w="12700" cap="flat" cmpd="sng" algn="ctr">
+                      <a:solidFill>
+                        <a:schemeClr val="tx1"/>
+                      </a:solidFill>
+                      <a:prstDash val="solid"/>
+                      <a:round/>
+                      <a:headEnd type="none" w="med" len="med"/>
+                      <a:tailEnd type="none" w="med" len="med"/>
+                    </a:lnL>
+                    <a:lnR w="12700" cap="flat" cmpd="sng" algn="ctr">
+                      <a:solidFill>
+                        <a:schemeClr val="tx1"/>
+                      </a:solidFill>
+                      <a:prstDash val="solid"/>
+                      <a:round/>
+                      <a:headEnd type="none" w="med" len="med"/>
+                      <a:tailEnd type="none" w="med" len="med"/>
+                    </a:lnR>
+                    <a:lnT w="12700" cap="flat" cmpd="sng" algn="ctr">
+                      <a:solidFill>
+                        <a:schemeClr val="tx1"/>
+                      </a:solidFill>
+                      <a:prstDash val="solid"/>
+                      <a:round/>
+                      <a:headEnd type="none" w="med" len="med"/>
+                      <a:tailEnd type="none" w="med" len="med"/>
+                    </a:lnT>
+                    <a:lnB w="12700" cap="flat" cmpd="sng" algn="ctr">
+                      <a:solidFill>
+                        <a:schemeClr val="tx1"/>
+                      </a:solidFill>
+                      <a:prstDash val="solid"/>
+                      <a:round/>
+                      <a:headEnd type="none" w="med" len="med"/>
+                      <a:tailEnd type="none" w="med" len="med"/>
+                    </a:lnB>
+                    <a:solidFill>
+                      <a:schemeClr val="bg1"/>
+                    </a:solidFill>
+                  </a:tcPr>
+                </a:tc>
+                <a:tc>
+                  <a:txBody>
+                    <a:bodyPr/>
+                    <a:lstStyle/>
+                    <a:p>
+                      <a:endParaRPr kumimoji="1" lang="ja-JP" altLang="en-US" dirty="0"/>
+                    </a:p>
+                  </a:txBody>
+                  <a:tcPr>
+                    <a:lnL w="12700" cap="flat" cmpd="sng" algn="ctr">
+                      <a:solidFill>
+                        <a:schemeClr val="tx1"/>
+                      </a:solidFill>
+                      <a:prstDash val="solid"/>
+                      <a:round/>
+                      <a:headEnd type="none" w="med" len="med"/>
+                      <a:tailEnd type="none" w="med" len="med"/>
+                    </a:lnL>
+                    <a:lnR w="12700" cap="flat" cmpd="sng" algn="ctr">
+                      <a:solidFill>
+                        <a:schemeClr val="tx1"/>
+                      </a:solidFill>
+                      <a:prstDash val="solid"/>
+                      <a:round/>
+                      <a:headEnd type="none" w="med" len="med"/>
+                      <a:tailEnd type="none" w="med" len="med"/>
+                    </a:lnR>
+                    <a:lnT w="12700" cap="flat" cmpd="sng" algn="ctr">
+                      <a:solidFill>
+                        <a:schemeClr val="tx1"/>
+                      </a:solidFill>
+                      <a:prstDash val="solid"/>
+                      <a:round/>
+                      <a:headEnd type="none" w="med" len="med"/>
+                      <a:tailEnd type="none" w="med" len="med"/>
+                    </a:lnT>
+                    <a:lnB w="12700" cap="flat" cmpd="sng" algn="ctr">
+                      <a:solidFill>
+                        <a:schemeClr val="tx1"/>
+                      </a:solidFill>
+                      <a:prstDash val="solid"/>
+                      <a:round/>
+                      <a:headEnd type="none" w="med" len="med"/>
+                      <a:tailEnd type="none" w="med" len="med"/>
+                    </a:lnB>
+                    <a:solidFill>
+                      <a:schemeClr val="bg1"/>
+                    </a:solidFill>
+                  </a:tcPr>
+                </a:tc>
+                <a:extLst>
+                  <a:ext uri="{0D108BD9-81ED-4DB2-BD59-A6C34878D82A}">
+                    <a16:rowId xmlns:a16="http://schemas.microsoft.com/office/drawing/2014/main" val="1888340823"/>
+                  </a:ext>
+                </a:extLst>
+              </a:tr>
+              <a:tr h="676738">
+                <a:tc>
+                  <a:txBody>
+                    <a:bodyPr/>
+                    <a:lstStyle/>
+                    <a:p>
+                      <a:endParaRPr kumimoji="1" lang="ja-JP" altLang="en-US" dirty="0"/>
+                    </a:p>
+                  </a:txBody>
+                  <a:tcPr>
+                    <a:lnL w="12700" cap="flat" cmpd="sng" algn="ctr">
+                      <a:solidFill>
+                        <a:schemeClr val="tx1"/>
+                      </a:solidFill>
+                      <a:prstDash val="solid"/>
+                      <a:round/>
+                      <a:headEnd type="none" w="med" len="med"/>
+                      <a:tailEnd type="none" w="med" len="med"/>
+                    </a:lnL>
+                    <a:lnR w="12700" cap="flat" cmpd="sng" algn="ctr">
+                      <a:solidFill>
+                        <a:schemeClr val="tx1"/>
+                      </a:solidFill>
+                      <a:prstDash val="solid"/>
+                      <a:round/>
+                      <a:headEnd type="none" w="med" len="med"/>
+                      <a:tailEnd type="none" w="med" len="med"/>
+                    </a:lnR>
+                    <a:lnT w="12700" cap="flat" cmpd="sng" algn="ctr">
+                      <a:solidFill>
+                        <a:schemeClr val="tx1"/>
+                      </a:solidFill>
+                      <a:prstDash val="solid"/>
+                      <a:round/>
+                      <a:headEnd type="none" w="med" len="med"/>
+                      <a:tailEnd type="none" w="med" len="med"/>
+                    </a:lnT>
+                    <a:lnB w="12700" cap="flat" cmpd="sng" algn="ctr">
+                      <a:solidFill>
+                        <a:schemeClr val="tx1"/>
+                      </a:solidFill>
+                      <a:prstDash val="solid"/>
+                      <a:round/>
+                      <a:headEnd type="none" w="med" len="med"/>
+                      <a:tailEnd type="none" w="med" len="med"/>
+                    </a:lnB>
+                    <a:solidFill>
+                      <a:schemeClr val="bg1"/>
+                    </a:solidFill>
+                  </a:tcPr>
+                </a:tc>
+                <a:tc>
+                  <a:txBody>
+                    <a:bodyPr/>
+                    <a:lstStyle/>
+                    <a:p>
+                      <a:endParaRPr kumimoji="1" lang="ja-JP" altLang="en-US" dirty="0"/>
+                    </a:p>
+                  </a:txBody>
+                  <a:tcPr>
+                    <a:lnL w="12700" cap="flat" cmpd="sng" algn="ctr">
+                      <a:solidFill>
+                        <a:schemeClr val="tx1"/>
+                      </a:solidFill>
+                      <a:prstDash val="solid"/>
+                      <a:round/>
+                      <a:headEnd type="none" w="med" len="med"/>
+                      <a:tailEnd type="none" w="med" len="med"/>
+                    </a:lnL>
+                    <a:lnR w="12700" cap="flat" cmpd="sng" algn="ctr">
+                      <a:solidFill>
+                        <a:schemeClr val="tx1"/>
+                      </a:solidFill>
+                      <a:prstDash val="solid"/>
+                      <a:round/>
+                      <a:headEnd type="none" w="med" len="med"/>
+                      <a:tailEnd type="none" w="med" len="med"/>
+                    </a:lnR>
+                    <a:lnT w="12700" cap="flat" cmpd="sng" algn="ctr">
+                      <a:solidFill>
+                        <a:schemeClr val="tx1"/>
+                      </a:solidFill>
+                      <a:prstDash val="solid"/>
+                      <a:round/>
+                      <a:headEnd type="none" w="med" len="med"/>
+                      <a:tailEnd type="none" w="med" len="med"/>
+                    </a:lnT>
+                    <a:lnB w="12700" cap="flat" cmpd="sng" algn="ctr">
+                      <a:solidFill>
+                        <a:schemeClr val="tx1"/>
+                      </a:solidFill>
+                      <a:prstDash val="solid"/>
+                      <a:round/>
+                      <a:headEnd type="none" w="med" len="med"/>
+                      <a:tailEnd type="none" w="med" len="med"/>
+                    </a:lnB>
+                    <a:solidFill>
+                      <a:schemeClr val="bg1"/>
+                    </a:solidFill>
+                  </a:tcPr>
+                </a:tc>
+                <a:extLst>
+                  <a:ext uri="{0D108BD9-81ED-4DB2-BD59-A6C34878D82A}">
+                    <a16:rowId xmlns:a16="http://schemas.microsoft.com/office/drawing/2014/main" val="1168254549"/>
+                  </a:ext>
+                </a:extLst>
+              </a:tr>
+              <a:tr h="676738">
+                <a:tc>
+                  <a:txBody>
+                    <a:bodyPr/>
+                    <a:lstStyle/>
+                    <a:p>
+                      <a:endParaRPr kumimoji="1" lang="ja-JP" altLang="en-US" dirty="0"/>
+                    </a:p>
+                  </a:txBody>
+                  <a:tcPr>
+                    <a:lnL w="12700" cap="flat" cmpd="sng" algn="ctr">
+                      <a:solidFill>
+                        <a:schemeClr val="tx1"/>
+                      </a:solidFill>
+                      <a:prstDash val="solid"/>
+                      <a:round/>
+                      <a:headEnd type="none" w="med" len="med"/>
+                      <a:tailEnd type="none" w="med" len="med"/>
+                    </a:lnL>
+                    <a:lnR w="12700" cap="flat" cmpd="sng" algn="ctr">
+                      <a:solidFill>
+                        <a:schemeClr val="tx1"/>
+                      </a:solidFill>
+                      <a:prstDash val="solid"/>
+                      <a:round/>
+                      <a:headEnd type="none" w="med" len="med"/>
+                      <a:tailEnd type="none" w="med" len="med"/>
+                    </a:lnR>
+                    <a:lnT w="12700" cap="flat" cmpd="sng" algn="ctr">
+                      <a:solidFill>
+                        <a:schemeClr val="tx1"/>
+                      </a:solidFill>
+                      <a:prstDash val="solid"/>
+                      <a:round/>
+                      <a:headEnd type="none" w="med" len="med"/>
+                      <a:tailEnd type="none" w="med" len="med"/>
+                    </a:lnT>
+                    <a:lnB w="12700" cap="flat" cmpd="sng" algn="ctr">
+                      <a:solidFill>
+                        <a:schemeClr val="tx1"/>
+                      </a:solidFill>
+                      <a:prstDash val="solid"/>
+                      <a:round/>
+                      <a:headEnd type="none" w="med" len="med"/>
+                      <a:tailEnd type="none" w="med" len="med"/>
+                    </a:lnB>
+                    <a:solidFill>
+                      <a:schemeClr val="bg1"/>
+                    </a:solidFill>
+                  </a:tcPr>
+                </a:tc>
+                <a:tc>
+                  <a:txBody>
+                    <a:bodyPr/>
+                    <a:lstStyle/>
+                    <a:p>
+                      <a:endParaRPr kumimoji="1" lang="ja-JP" altLang="en-US" dirty="0"/>
+                    </a:p>
+                  </a:txBody>
+                  <a:tcPr>
+                    <a:lnL w="12700" cap="flat" cmpd="sng" algn="ctr">
+                      <a:solidFill>
+                        <a:schemeClr val="tx1"/>
+                      </a:solidFill>
+                      <a:prstDash val="solid"/>
+                      <a:round/>
+                      <a:headEnd type="none" w="med" len="med"/>
+                      <a:tailEnd type="none" w="med" len="med"/>
+                    </a:lnL>
+                    <a:lnR w="12700" cap="flat" cmpd="sng" algn="ctr">
+                      <a:solidFill>
+                        <a:schemeClr val="tx1"/>
+                      </a:solidFill>
+                      <a:prstDash val="solid"/>
+                      <a:round/>
+                      <a:headEnd type="none" w="med" len="med"/>
+                      <a:tailEnd type="none" w="med" len="med"/>
+                    </a:lnR>
+                    <a:lnT w="12700" cap="flat" cmpd="sng" algn="ctr">
+                      <a:solidFill>
+                        <a:schemeClr val="tx1"/>
+                      </a:solidFill>
+                      <a:prstDash val="solid"/>
+                      <a:round/>
+                      <a:headEnd type="none" w="med" len="med"/>
+                      <a:tailEnd type="none" w="med" len="med"/>
+                    </a:lnT>
+                    <a:lnB w="12700" cap="flat" cmpd="sng" algn="ctr">
+                      <a:solidFill>
+                        <a:schemeClr val="tx1"/>
+                      </a:solidFill>
+                      <a:prstDash val="solid"/>
+                      <a:round/>
+                      <a:headEnd type="none" w="med" len="med"/>
+                      <a:tailEnd type="none" w="med" len="med"/>
+                    </a:lnB>
+                    <a:solidFill>
+                      <a:schemeClr val="bg1"/>
+                    </a:solidFill>
+                  </a:tcPr>
+                </a:tc>
+                <a:extLst>
+                  <a:ext uri="{0D108BD9-81ED-4DB2-BD59-A6C34878D82A}">
+                    <a16:rowId xmlns:a16="http://schemas.microsoft.com/office/drawing/2014/main" val="3941317674"/>
+                  </a:ext>
+                </a:extLst>
+              </a:tr>
+              <a:tr h="676738">
+                <a:tc>
+                  <a:txBody>
+                    <a:bodyPr/>
+                    <a:lstStyle/>
+                    <a:p>
+                      <a:endParaRPr kumimoji="1" lang="ja-JP" altLang="en-US" dirty="0"/>
+                    </a:p>
+                  </a:txBody>
+                  <a:tcPr>
+                    <a:lnL w="12700" cap="flat" cmpd="sng" algn="ctr">
+                      <a:solidFill>
+                        <a:schemeClr val="tx1"/>
+                      </a:solidFill>
+                      <a:prstDash val="solid"/>
+                      <a:round/>
+                      <a:headEnd type="none" w="med" len="med"/>
+                      <a:tailEnd type="none" w="med" len="med"/>
+                    </a:lnL>
+                    <a:lnR w="12700" cap="flat" cmpd="sng" algn="ctr">
+                      <a:solidFill>
+                        <a:schemeClr val="tx1"/>
+                      </a:solidFill>
+                      <a:prstDash val="solid"/>
+                      <a:round/>
+                      <a:headEnd type="none" w="med" len="med"/>
+                      <a:tailEnd type="none" w="med" len="med"/>
+                    </a:lnR>
+                    <a:lnT w="12700" cap="flat" cmpd="sng" algn="ctr">
+                      <a:solidFill>
+                        <a:schemeClr val="tx1"/>
+                      </a:solidFill>
+                      <a:prstDash val="solid"/>
+                      <a:round/>
+                      <a:headEnd type="none" w="med" len="med"/>
+                      <a:tailEnd type="none" w="med" len="med"/>
+                    </a:lnT>
+                    <a:lnB w="12700" cap="flat" cmpd="sng" algn="ctr">
+                      <a:solidFill>
+                        <a:schemeClr val="tx1"/>
+                      </a:solidFill>
+                      <a:prstDash val="solid"/>
+                      <a:round/>
+                      <a:headEnd type="none" w="med" len="med"/>
+                      <a:tailEnd type="none" w="med" len="med"/>
+                    </a:lnB>
+                    <a:solidFill>
+                      <a:schemeClr val="bg1"/>
+                    </a:solidFill>
+                  </a:tcPr>
+                </a:tc>
+                <a:tc>
+                  <a:txBody>
+                    <a:bodyPr/>
+                    <a:lstStyle/>
+                    <a:p>
+                      <a:endParaRPr kumimoji="1" lang="ja-JP" altLang="en-US" dirty="0"/>
+                    </a:p>
+                  </a:txBody>
+                  <a:tcPr>
+                    <a:lnL w="12700" cap="flat" cmpd="sng" algn="ctr">
+                      <a:solidFill>
+                        <a:schemeClr val="tx1"/>
+                      </a:solidFill>
+                      <a:prstDash val="solid"/>
+                      <a:round/>
+                      <a:headEnd type="none" w="med" len="med"/>
+                      <a:tailEnd type="none" w="med" len="med"/>
+                    </a:lnL>
+                    <a:lnR w="12700" cap="flat" cmpd="sng" algn="ctr">
+                      <a:solidFill>
+                        <a:schemeClr val="tx1"/>
+                      </a:solidFill>
+                      <a:prstDash val="solid"/>
+                      <a:round/>
+                      <a:headEnd type="none" w="med" len="med"/>
+                      <a:tailEnd type="none" w="med" len="med"/>
+                    </a:lnR>
+                    <a:lnT w="12700" cap="flat" cmpd="sng" algn="ctr">
+                      <a:solidFill>
+                        <a:schemeClr val="tx1"/>
+                      </a:solidFill>
+                      <a:prstDash val="solid"/>
+                      <a:round/>
+                      <a:headEnd type="none" w="med" len="med"/>
+                      <a:tailEnd type="none" w="med" len="med"/>
+                    </a:lnT>
+                    <a:lnB w="12700" cap="flat" cmpd="sng" algn="ctr">
+                      <a:solidFill>
+                        <a:schemeClr val="tx1"/>
+                      </a:solidFill>
+                      <a:prstDash val="solid"/>
+                      <a:round/>
+                      <a:headEnd type="none" w="med" len="med"/>
+                      <a:tailEnd type="none" w="med" len="med"/>
+                    </a:lnB>
+                    <a:solidFill>
+                      <a:schemeClr val="bg1"/>
+                    </a:solidFill>
+                  </a:tcPr>
+                </a:tc>
+                <a:extLst>
+                  <a:ext uri="{0D108BD9-81ED-4DB2-BD59-A6C34878D82A}">
+                    <a16:rowId xmlns:a16="http://schemas.microsoft.com/office/drawing/2014/main" val="4241612204"/>
+                  </a:ext>
+                </a:extLst>
+              </a:tr>
+              <a:tr h="676738">
+                <a:tc>
+                  <a:txBody>
+                    <a:bodyPr/>
+                    <a:lstStyle/>
+                    <a:p>
+                      <a:endParaRPr kumimoji="1" lang="ja-JP" altLang="en-US"/>
+                    </a:p>
+                  </a:txBody>
+                  <a:tcPr>
+                    <a:lnL w="12700" cap="flat" cmpd="sng" algn="ctr">
+                      <a:solidFill>
+                        <a:schemeClr val="tx1"/>
+                      </a:solidFill>
+                      <a:prstDash val="solid"/>
+                      <a:round/>
+                      <a:headEnd type="none" w="med" len="med"/>
+                      <a:tailEnd type="none" w="med" len="med"/>
+                    </a:lnL>
+                    <a:lnR w="12700" cap="flat" cmpd="sng" algn="ctr">
+                      <a:solidFill>
+                        <a:schemeClr val="tx1"/>
+                      </a:solidFill>
+                      <a:prstDash val="solid"/>
+                      <a:round/>
+                      <a:headEnd type="none" w="med" len="med"/>
+                      <a:tailEnd type="none" w="med" len="med"/>
+                    </a:lnR>
+                    <a:lnT w="12700" cap="flat" cmpd="sng" algn="ctr">
+                      <a:solidFill>
+                        <a:schemeClr val="tx1"/>
+                      </a:solidFill>
+                      <a:prstDash val="solid"/>
+                      <a:round/>
+                      <a:headEnd type="none" w="med" len="med"/>
+                      <a:tailEnd type="none" w="med" len="med"/>
+                    </a:lnT>
+                    <a:lnB w="12700" cap="flat" cmpd="sng" algn="ctr">
+                      <a:solidFill>
+                        <a:schemeClr val="tx1"/>
+                      </a:solidFill>
+                      <a:prstDash val="solid"/>
+                      <a:round/>
+                      <a:headEnd type="none" w="med" len="med"/>
+                      <a:tailEnd type="none" w="med" len="med"/>
+                    </a:lnB>
+                    <a:solidFill>
+                      <a:schemeClr val="bg1"/>
+                    </a:solidFill>
+                  </a:tcPr>
+                </a:tc>
+                <a:tc>
+                  <a:txBody>
+                    <a:bodyPr/>
+                    <a:lstStyle/>
+                    <a:p>
+                      <a:endParaRPr kumimoji="1" lang="ja-JP" altLang="en-US" dirty="0"/>
+                    </a:p>
+                  </a:txBody>
+                  <a:tcPr>
+                    <a:lnL w="12700" cap="flat" cmpd="sng" algn="ctr">
+                      <a:solidFill>
+                        <a:schemeClr val="tx1"/>
+                      </a:solidFill>
+                      <a:prstDash val="solid"/>
+                      <a:round/>
+                      <a:headEnd type="none" w="med" len="med"/>
+                      <a:tailEnd type="none" w="med" len="med"/>
+                    </a:lnL>
+                    <a:lnR w="12700" cap="flat" cmpd="sng" algn="ctr">
+                      <a:solidFill>
+                        <a:schemeClr val="tx1"/>
+                      </a:solidFill>
+                      <a:prstDash val="solid"/>
+                      <a:round/>
+                      <a:headEnd type="none" w="med" len="med"/>
+                      <a:tailEnd type="none" w="med" len="med"/>
+                    </a:lnR>
+                    <a:lnT w="12700" cap="flat" cmpd="sng" algn="ctr">
+                      <a:solidFill>
+                        <a:schemeClr val="tx1"/>
+                      </a:solidFill>
+                      <a:prstDash val="solid"/>
+                      <a:round/>
+                      <a:headEnd type="none" w="med" len="med"/>
+                      <a:tailEnd type="none" w="med" len="med"/>
+                    </a:lnT>
+                    <a:lnB w="12700" cap="flat" cmpd="sng" algn="ctr">
+                      <a:solidFill>
+                        <a:schemeClr val="tx1"/>
+                      </a:solidFill>
+                      <a:prstDash val="solid"/>
+                      <a:round/>
+                      <a:headEnd type="none" w="med" len="med"/>
+                      <a:tailEnd type="none" w="med" len="med"/>
+                    </a:lnB>
+                    <a:solidFill>
+                      <a:schemeClr val="bg1"/>
+                    </a:solidFill>
+                  </a:tcPr>
+                </a:tc>
+                <a:extLst>
+                  <a:ext uri="{0D108BD9-81ED-4DB2-BD59-A6C34878D82A}">
+                    <a16:rowId xmlns:a16="http://schemas.microsoft.com/office/drawing/2014/main" val="2405261173"/>
+                  </a:ext>
+                </a:extLst>
+              </a:tr>
+              <a:tr h="676738">
+                <a:tc>
+                  <a:txBody>
+                    <a:bodyPr/>
+                    <a:lstStyle/>
+                    <a:p>
+                      <a:endParaRPr kumimoji="1" lang="ja-JP" altLang="en-US"/>
+                    </a:p>
+                  </a:txBody>
+                  <a:tcPr>
+                    <a:lnL w="12700" cap="flat" cmpd="sng" algn="ctr">
+                      <a:solidFill>
+                        <a:schemeClr val="tx1"/>
+                      </a:solidFill>
+                      <a:prstDash val="solid"/>
+                      <a:round/>
+                      <a:headEnd type="none" w="med" len="med"/>
+                      <a:tailEnd type="none" w="med" len="med"/>
+                    </a:lnL>
+                    <a:lnR w="12700" cap="flat" cmpd="sng" algn="ctr">
+                      <a:solidFill>
+                        <a:schemeClr val="tx1"/>
+                      </a:solidFill>
+                      <a:prstDash val="solid"/>
+                      <a:round/>
+                      <a:headEnd type="none" w="med" len="med"/>
+                      <a:tailEnd type="none" w="med" len="med"/>
+                    </a:lnR>
+                    <a:lnT w="12700" cap="flat" cmpd="sng" algn="ctr">
+                      <a:solidFill>
+                        <a:schemeClr val="tx1"/>
+                      </a:solidFill>
+                      <a:prstDash val="solid"/>
+                      <a:round/>
+                      <a:headEnd type="none" w="med" len="med"/>
+                      <a:tailEnd type="none" w="med" len="med"/>
+                    </a:lnT>
+                    <a:lnB w="12700" cap="flat" cmpd="sng" algn="ctr">
+                      <a:solidFill>
+                        <a:schemeClr val="tx1"/>
+                      </a:solidFill>
+                      <a:prstDash val="solid"/>
+                      <a:round/>
+                      <a:headEnd type="none" w="med" len="med"/>
+                      <a:tailEnd type="none" w="med" len="med"/>
+                    </a:lnB>
+                    <a:solidFill>
+                      <a:schemeClr val="bg1"/>
+                    </a:solidFill>
+                  </a:tcPr>
+                </a:tc>
+                <a:tc>
+                  <a:txBody>
+                    <a:bodyPr/>
+                    <a:lstStyle/>
+                    <a:p>
+                      <a:endParaRPr kumimoji="1" lang="ja-JP" altLang="en-US" dirty="0"/>
+                    </a:p>
+                  </a:txBody>
+                  <a:tcPr>
+                    <a:lnL w="12700" cap="flat" cmpd="sng" algn="ctr">
+                      <a:solidFill>
+                        <a:schemeClr val="tx1"/>
+                      </a:solidFill>
+                      <a:prstDash val="solid"/>
+                      <a:round/>
+                      <a:headEnd type="none" w="med" len="med"/>
+                      <a:tailEnd type="none" w="med" len="med"/>
+                    </a:lnL>
+                    <a:lnR w="12700" cap="flat" cmpd="sng" algn="ctr">
+                      <a:solidFill>
+                        <a:schemeClr val="tx1"/>
+                      </a:solidFill>
+                      <a:prstDash val="solid"/>
+                      <a:round/>
+                      <a:headEnd type="none" w="med" len="med"/>
+                      <a:tailEnd type="none" w="med" len="med"/>
+                    </a:lnR>
+                    <a:lnT w="12700" cap="flat" cmpd="sng" algn="ctr">
+                      <a:solidFill>
+                        <a:schemeClr val="tx1"/>
+                      </a:solidFill>
+                      <a:prstDash val="solid"/>
+                      <a:round/>
+                      <a:headEnd type="none" w="med" len="med"/>
+                      <a:tailEnd type="none" w="med" len="med"/>
+                    </a:lnT>
+                    <a:lnB w="12700" cap="flat" cmpd="sng" algn="ctr">
+                      <a:solidFill>
+                        <a:schemeClr val="tx1"/>
+                      </a:solidFill>
+                      <a:prstDash val="solid"/>
+                      <a:round/>
+                      <a:headEnd type="none" w="med" len="med"/>
+                      <a:tailEnd type="none" w="med" len="med"/>
+                    </a:lnB>
+                    <a:solidFill>
+                      <a:schemeClr val="bg1"/>
+                    </a:solidFill>
+                  </a:tcPr>
+                </a:tc>
+                <a:extLst>
+                  <a:ext uri="{0D108BD9-81ED-4DB2-BD59-A6C34878D82A}">
+                    <a16:rowId xmlns:a16="http://schemas.microsoft.com/office/drawing/2014/main" val="3318169012"/>
+                  </a:ext>
+                </a:extLst>
+              </a:tr>
+              <a:tr h="676738">
+                <a:tc>
+                  <a:txBody>
+                    <a:bodyPr/>
+                    <a:lstStyle/>
+                    <a:p>
+                      <a:endParaRPr kumimoji="1" lang="ja-JP" altLang="en-US"/>
+                    </a:p>
+                  </a:txBody>
+                  <a:tcPr>
+                    <a:lnL w="12700" cap="flat" cmpd="sng" algn="ctr">
+                      <a:solidFill>
+                        <a:schemeClr val="tx1"/>
+                      </a:solidFill>
+                      <a:prstDash val="solid"/>
+                      <a:round/>
+                      <a:headEnd type="none" w="med" len="med"/>
+                      <a:tailEnd type="none" w="med" len="med"/>
+                    </a:lnL>
+                    <a:lnR w="12700" cap="flat" cmpd="sng" algn="ctr">
+                      <a:solidFill>
+                        <a:schemeClr val="tx1"/>
+                      </a:solidFill>
+                      <a:prstDash val="solid"/>
+                      <a:round/>
+                      <a:headEnd type="none" w="med" len="med"/>
+                      <a:tailEnd type="none" w="med" len="med"/>
+                    </a:lnR>
+                    <a:lnT w="12700" cap="flat" cmpd="sng" algn="ctr">
+                      <a:solidFill>
+                        <a:schemeClr val="tx1"/>
+                      </a:solidFill>
+                      <a:prstDash val="solid"/>
+                      <a:round/>
+                      <a:headEnd type="none" w="med" len="med"/>
+                      <a:tailEnd type="none" w="med" len="med"/>
+                    </a:lnT>
+                    <a:lnB w="12700" cap="flat" cmpd="sng" algn="ctr">
+                      <a:solidFill>
+                        <a:schemeClr val="tx1"/>
+                      </a:solidFill>
+                      <a:prstDash val="solid"/>
+                      <a:round/>
+                      <a:headEnd type="none" w="med" len="med"/>
+                      <a:tailEnd type="none" w="med" len="med"/>
+                    </a:lnB>
+                    <a:solidFill>
+                      <a:schemeClr val="bg1"/>
+                    </a:solidFill>
+                  </a:tcPr>
+                </a:tc>
+                <a:tc>
+                  <a:txBody>
+                    <a:bodyPr/>
+                    <a:lstStyle/>
+                    <a:p>
+                      <a:endParaRPr kumimoji="1" lang="ja-JP" altLang="en-US" dirty="0"/>
+                    </a:p>
+                  </a:txBody>
+                  <a:tcPr>
+                    <a:lnL w="12700" cap="flat" cmpd="sng" algn="ctr">
+                      <a:solidFill>
+                        <a:schemeClr val="tx1"/>
+                      </a:solidFill>
+                      <a:prstDash val="solid"/>
+                      <a:round/>
+                      <a:headEnd type="none" w="med" len="med"/>
+                      <a:tailEnd type="none" w="med" len="med"/>
+                    </a:lnL>
+                    <a:lnR w="12700" cap="flat" cmpd="sng" algn="ctr">
+                      <a:solidFill>
+                        <a:schemeClr val="tx1"/>
+                      </a:solidFill>
+                      <a:prstDash val="solid"/>
+                      <a:round/>
+                      <a:headEnd type="none" w="med" len="med"/>
+                      <a:tailEnd type="none" w="med" len="med"/>
+                    </a:lnR>
+                    <a:lnT w="12700" cap="flat" cmpd="sng" algn="ctr">
+                      <a:solidFill>
+                        <a:schemeClr val="tx1"/>
+                      </a:solidFill>
+                      <a:prstDash val="solid"/>
+                      <a:round/>
+                      <a:headEnd type="none" w="med" len="med"/>
+                      <a:tailEnd type="none" w="med" len="med"/>
+                    </a:lnT>
+                    <a:lnB w="12700" cap="flat" cmpd="sng" algn="ctr">
+                      <a:solidFill>
+                        <a:schemeClr val="tx1"/>
+                      </a:solidFill>
+                      <a:prstDash val="solid"/>
+                      <a:round/>
+                      <a:headEnd type="none" w="med" len="med"/>
+                      <a:tailEnd type="none" w="med" len="med"/>
+                    </a:lnB>
+                    <a:solidFill>
+                      <a:schemeClr val="bg1"/>
+                    </a:solidFill>
+                  </a:tcPr>
+                </a:tc>
+                <a:extLst>
+                  <a:ext uri="{0D108BD9-81ED-4DB2-BD59-A6C34878D82A}">
+                    <a16:rowId xmlns:a16="http://schemas.microsoft.com/office/drawing/2014/main" val="3154491127"/>
+                  </a:ext>
+                </a:extLst>
+              </a:tr>
+              <a:tr h="676738">
+                <a:tc>
+                  <a:txBody>
+                    <a:bodyPr/>
+                    <a:lstStyle/>
+                    <a:p>
+                      <a:endParaRPr kumimoji="1" lang="ja-JP" altLang="en-US"/>
+                    </a:p>
+                  </a:txBody>
+                  <a:tcPr>
+                    <a:lnL w="12700" cap="flat" cmpd="sng" algn="ctr">
+                      <a:solidFill>
+                        <a:schemeClr val="tx1"/>
+                      </a:solidFill>
+                      <a:prstDash val="solid"/>
+                      <a:round/>
+                      <a:headEnd type="none" w="med" len="med"/>
+                      <a:tailEnd type="none" w="med" len="med"/>
+                    </a:lnL>
+                    <a:lnR w="12700" cap="flat" cmpd="sng" algn="ctr">
+                      <a:solidFill>
+                        <a:schemeClr val="tx1"/>
+                      </a:solidFill>
+                      <a:prstDash val="solid"/>
+                      <a:round/>
+                      <a:headEnd type="none" w="med" len="med"/>
+                      <a:tailEnd type="none" w="med" len="med"/>
+                    </a:lnR>
+                    <a:lnT w="12700" cap="flat" cmpd="sng" algn="ctr">
+                      <a:solidFill>
+                        <a:schemeClr val="tx1"/>
+                      </a:solidFill>
+                      <a:prstDash val="solid"/>
+                      <a:round/>
+                      <a:headEnd type="none" w="med" len="med"/>
+                      <a:tailEnd type="none" w="med" len="med"/>
+                    </a:lnT>
+                    <a:lnB w="12700" cap="flat" cmpd="sng" algn="ctr">
+                      <a:solidFill>
+                        <a:schemeClr val="tx1"/>
+                      </a:solidFill>
+                      <a:prstDash val="solid"/>
+                      <a:round/>
+                      <a:headEnd type="none" w="med" len="med"/>
+                      <a:tailEnd type="none" w="med" len="med"/>
+                    </a:lnB>
+                    <a:solidFill>
+                      <a:schemeClr val="bg1"/>
+                    </a:solidFill>
+                  </a:tcPr>
+                </a:tc>
+                <a:tc>
+                  <a:txBody>
+                    <a:bodyPr/>
+                    <a:lstStyle/>
+                    <a:p>
+                      <a:endParaRPr kumimoji="1" lang="ja-JP" altLang="en-US" dirty="0"/>
+                    </a:p>
+                  </a:txBody>
+                  <a:tcPr>
+                    <a:lnL w="12700" cap="flat" cmpd="sng" algn="ctr">
+                      <a:solidFill>
+                        <a:schemeClr val="tx1"/>
+                      </a:solidFill>
+                      <a:prstDash val="solid"/>
+                      <a:round/>
+                      <a:headEnd type="none" w="med" len="med"/>
+                      <a:tailEnd type="none" w="med" len="med"/>
+                    </a:lnL>
+                    <a:lnR w="12700" cap="flat" cmpd="sng" algn="ctr">
+                      <a:solidFill>
+                        <a:schemeClr val="tx1"/>
+                      </a:solidFill>
+                      <a:prstDash val="solid"/>
+                      <a:round/>
+                      <a:headEnd type="none" w="med" len="med"/>
+                      <a:tailEnd type="none" w="med" len="med"/>
+                    </a:lnR>
+                    <a:lnT w="12700" cap="flat" cmpd="sng" algn="ctr">
+                      <a:solidFill>
+                        <a:schemeClr val="tx1"/>
+                      </a:solidFill>
+                      <a:prstDash val="solid"/>
+                      <a:round/>
+                      <a:headEnd type="none" w="med" len="med"/>
+                      <a:tailEnd type="none" w="med" len="med"/>
+                    </a:lnT>
+                    <a:lnB w="12700" cap="flat" cmpd="sng" algn="ctr">
+                      <a:solidFill>
+                        <a:schemeClr val="tx1"/>
+                      </a:solidFill>
+                      <a:prstDash val="solid"/>
+                      <a:round/>
+                      <a:headEnd type="none" w="med" len="med"/>
+                      <a:tailEnd type="none" w="med" len="med"/>
+                    </a:lnB>
+                    <a:solidFill>
+                      <a:schemeClr val="bg1"/>
+                    </a:solidFill>
+                  </a:tcPr>
+                </a:tc>
+                <a:extLst>
+                  <a:ext uri="{0D108BD9-81ED-4DB2-BD59-A6C34878D82A}">
+                    <a16:rowId xmlns:a16="http://schemas.microsoft.com/office/drawing/2014/main" val="729686559"/>
+                  </a:ext>
+                </a:extLst>
+              </a:tr>
+              <a:tr h="676738">
+                <a:tc>
+                  <a:txBody>
+                    <a:bodyPr/>
+                    <a:lstStyle/>
+                    <a:p>
+                      <a:endParaRPr kumimoji="1" lang="ja-JP" altLang="en-US"/>
+                    </a:p>
+                  </a:txBody>
+                  <a:tcPr>
+                    <a:lnL w="12700" cap="flat" cmpd="sng" algn="ctr">
+                      <a:solidFill>
+                        <a:schemeClr val="tx1"/>
+                      </a:solidFill>
+                      <a:prstDash val="solid"/>
+                      <a:round/>
+                      <a:headEnd type="none" w="med" len="med"/>
+                      <a:tailEnd type="none" w="med" len="med"/>
+                    </a:lnL>
+                    <a:lnR w="12700" cap="flat" cmpd="sng" algn="ctr">
+                      <a:solidFill>
+                        <a:schemeClr val="tx1"/>
+                      </a:solidFill>
+                      <a:prstDash val="solid"/>
+                      <a:round/>
+                      <a:headEnd type="none" w="med" len="med"/>
+                      <a:tailEnd type="none" w="med" len="med"/>
+                    </a:lnR>
+                    <a:lnT w="12700" cap="flat" cmpd="sng" algn="ctr">
+                      <a:solidFill>
+                        <a:schemeClr val="tx1"/>
+                      </a:solidFill>
+                      <a:prstDash val="solid"/>
+                      <a:round/>
+                      <a:headEnd type="none" w="med" len="med"/>
+                      <a:tailEnd type="none" w="med" len="med"/>
+                    </a:lnT>
+                    <a:lnB w="12700" cap="flat" cmpd="sng" algn="ctr">
+                      <a:solidFill>
+                        <a:schemeClr val="tx1"/>
+                      </a:solidFill>
+                      <a:prstDash val="solid"/>
+                      <a:round/>
+                      <a:headEnd type="none" w="med" len="med"/>
+                      <a:tailEnd type="none" w="med" len="med"/>
+                    </a:lnB>
+                    <a:solidFill>
+                      <a:schemeClr val="bg1"/>
+                    </a:solidFill>
+                  </a:tcPr>
+                </a:tc>
+                <a:tc>
+                  <a:txBody>
+                    <a:bodyPr/>
+                    <a:lstStyle/>
+                    <a:p>
+                      <a:endParaRPr kumimoji="1" lang="ja-JP" altLang="en-US" dirty="0"/>
+                    </a:p>
+                  </a:txBody>
+                  <a:tcPr>
+                    <a:lnL w="12700" cap="flat" cmpd="sng" algn="ctr">
+                      <a:solidFill>
+                        <a:schemeClr val="tx1"/>
+                      </a:solidFill>
+                      <a:prstDash val="solid"/>
+                      <a:round/>
+                      <a:headEnd type="none" w="med" len="med"/>
+                      <a:tailEnd type="none" w="med" len="med"/>
+                    </a:lnL>
+                    <a:lnR w="12700" cap="flat" cmpd="sng" algn="ctr">
+                      <a:solidFill>
+                        <a:schemeClr val="tx1"/>
+                      </a:solidFill>
+                      <a:prstDash val="solid"/>
+                      <a:round/>
+                      <a:headEnd type="none" w="med" len="med"/>
+                      <a:tailEnd type="none" w="med" len="med"/>
+                    </a:lnR>
+                    <a:lnT w="12700" cap="flat" cmpd="sng" algn="ctr">
+                      <a:solidFill>
+                        <a:schemeClr val="tx1"/>
+                      </a:solidFill>
+                      <a:prstDash val="solid"/>
+                      <a:round/>
+                      <a:headEnd type="none" w="med" len="med"/>
+                      <a:tailEnd type="none" w="med" len="med"/>
+                    </a:lnT>
+                    <a:lnB w="12700" cap="flat" cmpd="sng" algn="ctr">
+                      <a:solidFill>
+                        <a:schemeClr val="tx1"/>
+                      </a:solidFill>
+                      <a:prstDash val="solid"/>
+                      <a:round/>
+                      <a:headEnd type="none" w="med" len="med"/>
+                      <a:tailEnd type="none" w="med" len="med"/>
+                    </a:lnB>
+                    <a:solidFill>
+                      <a:schemeClr val="bg1"/>
+                    </a:solidFill>
+                  </a:tcPr>
+                </a:tc>
+                <a:extLst>
+                  <a:ext uri="{0D108BD9-81ED-4DB2-BD59-A6C34878D82A}">
+                    <a16:rowId xmlns:a16="http://schemas.microsoft.com/office/drawing/2014/main" val="24195793"/>
+                  </a:ext>
+                </a:extLst>
+              </a:tr>
+              <a:tr h="676738">
+                <a:tc>
+                  <a:txBody>
+                    <a:bodyPr/>
+                    <a:lstStyle/>
+                    <a:p>
+                      <a:endParaRPr kumimoji="1" lang="ja-JP" altLang="en-US" dirty="0"/>
+                    </a:p>
+                  </a:txBody>
+                  <a:tcPr>
+                    <a:lnL w="12700" cap="flat" cmpd="sng" algn="ctr">
+                      <a:solidFill>
+                        <a:schemeClr val="tx1"/>
+                      </a:solidFill>
+                      <a:prstDash val="solid"/>
+                      <a:round/>
+                      <a:headEnd type="none" w="med" len="med"/>
+                      <a:tailEnd type="none" w="med" len="med"/>
+                    </a:lnL>
+                    <a:lnR w="12700" cap="flat" cmpd="sng" algn="ctr">
+                      <a:solidFill>
+                        <a:schemeClr val="tx1"/>
+                      </a:solidFill>
+                      <a:prstDash val="solid"/>
+                      <a:round/>
+                      <a:headEnd type="none" w="med" len="med"/>
+                      <a:tailEnd type="none" w="med" len="med"/>
+                    </a:lnR>
+                    <a:lnT w="12700" cap="flat" cmpd="sng" algn="ctr">
+                      <a:solidFill>
+                        <a:schemeClr val="tx1"/>
+                      </a:solidFill>
+                      <a:prstDash val="solid"/>
+                      <a:round/>
+                      <a:headEnd type="none" w="med" len="med"/>
+                      <a:tailEnd type="none" w="med" len="med"/>
+                    </a:lnT>
+                    <a:lnB w="12700" cap="flat" cmpd="sng" algn="ctr">
+                      <a:solidFill>
+                        <a:schemeClr val="tx1"/>
+                      </a:solidFill>
+                      <a:prstDash val="solid"/>
+                      <a:round/>
+                      <a:headEnd type="none" w="med" len="med"/>
+                      <a:tailEnd type="none" w="med" len="med"/>
+                    </a:lnB>
+                    <a:solidFill>
+                      <a:schemeClr val="bg1"/>
+                    </a:solidFill>
+                  </a:tcPr>
+                </a:tc>
+                <a:tc>
+                  <a:txBody>
+                    <a:bodyPr/>
+                    <a:lstStyle/>
+                    <a:p>
+                      <a:endParaRPr kumimoji="1" lang="ja-JP" altLang="en-US" dirty="0"/>
+                    </a:p>
+                  </a:txBody>
+                  <a:tcPr>
+                    <a:lnL w="12700" cap="flat" cmpd="sng" algn="ctr">
+                      <a:solidFill>
+                        <a:schemeClr val="tx1"/>
+                      </a:solidFill>
+                      <a:prstDash val="solid"/>
+                      <a:round/>
+                      <a:headEnd type="none" w="med" len="med"/>
+                      <a:tailEnd type="none" w="med" len="med"/>
+                    </a:lnL>
+                    <a:lnR w="12700" cap="flat" cmpd="sng" algn="ctr">
+                      <a:solidFill>
+                        <a:schemeClr val="tx1"/>
+                      </a:solidFill>
+                      <a:prstDash val="solid"/>
+                      <a:round/>
+                      <a:headEnd type="none" w="med" len="med"/>
+                      <a:tailEnd type="none" w="med" len="med"/>
+                    </a:lnR>
+                    <a:lnT w="12700" cap="flat" cmpd="sng" algn="ctr">
+                      <a:solidFill>
+                        <a:schemeClr val="tx1"/>
+                      </a:solidFill>
+                      <a:prstDash val="solid"/>
+                      <a:round/>
+                      <a:headEnd type="none" w="med" len="med"/>
+                      <a:tailEnd type="none" w="med" len="med"/>
+                    </a:lnT>
+                    <a:lnB w="12700" cap="flat" cmpd="sng" algn="ctr">
+                      <a:solidFill>
+                        <a:schemeClr val="tx1"/>
+                      </a:solidFill>
+                      <a:prstDash val="solid"/>
+                      <a:round/>
+                      <a:headEnd type="none" w="med" len="med"/>
+                      <a:tailEnd type="none" w="med" len="med"/>
+                    </a:lnB>
+                    <a:solidFill>
+                      <a:schemeClr val="bg1"/>
+                    </a:solidFill>
+                  </a:tcPr>
+                </a:tc>
+                <a:extLst>
+                  <a:ext uri="{0D108BD9-81ED-4DB2-BD59-A6C34878D82A}">
+                    <a16:rowId xmlns:a16="http://schemas.microsoft.com/office/drawing/2014/main" val="436517883"/>
+                  </a:ext>
+                </a:extLst>
+              </a:tr>
+            </a:tbl>
+          </a:graphicData>
+        </a:graphic>
+      </p:graphicFrame>
+      <p:graphicFrame>
+        <p:nvGraphicFramePr>
+          <p:cNvPr id="6" name="表 5">
+            <a:extLst>
+              <a:ext uri="{FF2B5EF4-FFF2-40B4-BE49-F238E27FC236}">
+                <a16:creationId xmlns:a16="http://schemas.microsoft.com/office/drawing/2014/main" id="{7FD8FAE2-4987-A3C2-9689-5B574901E41A}"/>
+              </a:ext>
+            </a:extLst>
+          </p:cNvPr>
+          <p:cNvGraphicFramePr>
+            <a:graphicFrameLocks noGrp="1"/>
+          </p:cNvGraphicFramePr>
+          <p:nvPr>
+            <p:extLst>
+              <p:ext uri="{D42A27DB-BD31-4B8C-83A1-F6EECF244321}">
+                <p14:modId xmlns:p14="http://schemas.microsoft.com/office/powerpoint/2010/main" val="2462830204"/>
+              </p:ext>
+            </p:extLst>
+          </p:nvPr>
+        </p:nvGraphicFramePr>
+        <p:xfrm>
+          <a:off x="73526" y="50181"/>
+          <a:ext cx="922459" cy="6767380"/>
+        </p:xfrm>
+        <a:graphic>
+          <a:graphicData uri="http://schemas.openxmlformats.org/drawingml/2006/table">
+            <a:tbl>
+              <a:tblPr firstRow="1" bandRow="1">
+                <a:tableStyleId>{5C22544A-7EE6-4342-B048-85BDC9FD1C3A}</a:tableStyleId>
+              </a:tblPr>
+              <a:tblGrid>
+                <a:gridCol w="709934">
+                  <a:extLst>
+                    <a:ext uri="{9D8B030D-6E8A-4147-A177-3AD203B41FA5}">
+                      <a16:colId xmlns:a16="http://schemas.microsoft.com/office/drawing/2014/main" val="1713360762"/>
+                    </a:ext>
+                  </a:extLst>
+                </a:gridCol>
+                <a:gridCol w="212525">
+                  <a:extLst>
+                    <a:ext uri="{9D8B030D-6E8A-4147-A177-3AD203B41FA5}">
+                      <a16:colId xmlns:a16="http://schemas.microsoft.com/office/drawing/2014/main" val="2680084964"/>
+                    </a:ext>
+                  </a:extLst>
+                </a:gridCol>
+              </a:tblGrid>
+              <a:tr h="676738">
+                <a:tc>
+                  <a:txBody>
+                    <a:bodyPr/>
+                    <a:lstStyle/>
+                    <a:p>
+                      <a:endParaRPr kumimoji="1" lang="ja-JP" altLang="en-US"/>
+                    </a:p>
+                  </a:txBody>
+                  <a:tcPr>
+                    <a:lnL w="12700" cap="flat" cmpd="sng" algn="ctr">
+                      <a:solidFill>
+                        <a:schemeClr val="tx1"/>
+                      </a:solidFill>
+                      <a:prstDash val="solid"/>
+                      <a:round/>
+                      <a:headEnd type="none" w="med" len="med"/>
+                      <a:tailEnd type="none" w="med" len="med"/>
+                    </a:lnL>
+                    <a:lnR w="12700" cap="flat" cmpd="sng" algn="ctr">
+                      <a:solidFill>
+                        <a:schemeClr val="tx1"/>
+                      </a:solidFill>
+                      <a:prstDash val="solid"/>
+                      <a:round/>
+                      <a:headEnd type="none" w="med" len="med"/>
+                      <a:tailEnd type="none" w="med" len="med"/>
+                    </a:lnR>
+                    <a:lnT w="12700" cap="flat" cmpd="sng" algn="ctr">
+                      <a:solidFill>
+                        <a:schemeClr val="tx1"/>
+                      </a:solidFill>
+                      <a:prstDash val="solid"/>
+                      <a:round/>
+                      <a:headEnd type="none" w="med" len="med"/>
+                      <a:tailEnd type="none" w="med" len="med"/>
+                    </a:lnT>
+                    <a:lnB w="12700" cap="flat" cmpd="sng" algn="ctr">
+                      <a:solidFill>
+                        <a:schemeClr val="tx1"/>
+                      </a:solidFill>
+                      <a:prstDash val="solid"/>
+                      <a:round/>
+                      <a:headEnd type="none" w="med" len="med"/>
+                      <a:tailEnd type="none" w="med" len="med"/>
+                    </a:lnB>
+                    <a:solidFill>
+                      <a:schemeClr val="bg1"/>
+                    </a:solidFill>
+                  </a:tcPr>
+                </a:tc>
+                <a:tc>
+                  <a:txBody>
+                    <a:bodyPr/>
+                    <a:lstStyle/>
+                    <a:p>
+                      <a:endParaRPr kumimoji="1" lang="ja-JP" altLang="en-US" dirty="0"/>
+                    </a:p>
+                  </a:txBody>
+                  <a:tcPr>
+                    <a:lnL w="12700" cap="flat" cmpd="sng" algn="ctr">
+                      <a:solidFill>
+                        <a:schemeClr val="tx1"/>
+                      </a:solidFill>
+                      <a:prstDash val="solid"/>
+                      <a:round/>
+                      <a:headEnd type="none" w="med" len="med"/>
+                      <a:tailEnd type="none" w="med" len="med"/>
+                    </a:lnL>
+                    <a:lnR w="12700" cap="flat" cmpd="sng" algn="ctr">
+                      <a:solidFill>
+                        <a:schemeClr val="tx1"/>
+                      </a:solidFill>
+                      <a:prstDash val="solid"/>
+                      <a:round/>
+                      <a:headEnd type="none" w="med" len="med"/>
+                      <a:tailEnd type="none" w="med" len="med"/>
+                    </a:lnR>
+                    <a:lnT w="12700" cap="flat" cmpd="sng" algn="ctr">
+                      <a:solidFill>
+                        <a:schemeClr val="tx1"/>
+                      </a:solidFill>
+                      <a:prstDash val="solid"/>
+                      <a:round/>
+                      <a:headEnd type="none" w="med" len="med"/>
+                      <a:tailEnd type="none" w="med" len="med"/>
+                    </a:lnT>
+                    <a:lnB w="12700" cap="flat" cmpd="sng" algn="ctr">
+                      <a:solidFill>
+                        <a:schemeClr val="tx1"/>
+                      </a:solidFill>
+                      <a:prstDash val="solid"/>
+                      <a:round/>
+                      <a:headEnd type="none" w="med" len="med"/>
+                      <a:tailEnd type="none" w="med" len="med"/>
+                    </a:lnB>
+                    <a:solidFill>
+                      <a:schemeClr val="bg1"/>
+                    </a:solidFill>
+                  </a:tcPr>
+                </a:tc>
+                <a:extLst>
+                  <a:ext uri="{0D108BD9-81ED-4DB2-BD59-A6C34878D82A}">
+                    <a16:rowId xmlns:a16="http://schemas.microsoft.com/office/drawing/2014/main" val="1888340823"/>
+                  </a:ext>
+                </a:extLst>
+              </a:tr>
+              <a:tr h="676738">
+                <a:tc>
+                  <a:txBody>
+                    <a:bodyPr/>
+                    <a:lstStyle/>
+                    <a:p>
+                      <a:endParaRPr kumimoji="1" lang="ja-JP" altLang="en-US" dirty="0"/>
+                    </a:p>
+                  </a:txBody>
+                  <a:tcPr>
+                    <a:lnL w="12700" cap="flat" cmpd="sng" algn="ctr">
+                      <a:solidFill>
+                        <a:schemeClr val="tx1"/>
+                      </a:solidFill>
+                      <a:prstDash val="solid"/>
+                      <a:round/>
+                      <a:headEnd type="none" w="med" len="med"/>
+                      <a:tailEnd type="none" w="med" len="med"/>
+                    </a:lnL>
+                    <a:lnR w="12700" cap="flat" cmpd="sng" algn="ctr">
+                      <a:solidFill>
+                        <a:schemeClr val="tx1"/>
+                      </a:solidFill>
+                      <a:prstDash val="solid"/>
+                      <a:round/>
+                      <a:headEnd type="none" w="med" len="med"/>
+                      <a:tailEnd type="none" w="med" len="med"/>
+                    </a:lnR>
+                    <a:lnT w="12700" cap="flat" cmpd="sng" algn="ctr">
+                      <a:solidFill>
+                        <a:schemeClr val="tx1"/>
+                      </a:solidFill>
+                      <a:prstDash val="solid"/>
+                      <a:round/>
+                      <a:headEnd type="none" w="med" len="med"/>
+                      <a:tailEnd type="none" w="med" len="med"/>
+                    </a:lnT>
+                    <a:lnB w="12700" cap="flat" cmpd="sng" algn="ctr">
+                      <a:solidFill>
+                        <a:schemeClr val="tx1"/>
+                      </a:solidFill>
+                      <a:prstDash val="solid"/>
+                      <a:round/>
+                      <a:headEnd type="none" w="med" len="med"/>
+                      <a:tailEnd type="none" w="med" len="med"/>
+                    </a:lnB>
+                    <a:solidFill>
+                      <a:schemeClr val="bg1"/>
+                    </a:solidFill>
+                  </a:tcPr>
+                </a:tc>
+                <a:tc>
+                  <a:txBody>
+                    <a:bodyPr/>
+                    <a:lstStyle/>
+                    <a:p>
+                      <a:endParaRPr kumimoji="1" lang="ja-JP" altLang="en-US" dirty="0"/>
+                    </a:p>
+                  </a:txBody>
+                  <a:tcPr>
+                    <a:lnL w="12700" cap="flat" cmpd="sng" algn="ctr">
+                      <a:solidFill>
+                        <a:schemeClr val="tx1"/>
+                      </a:solidFill>
+                      <a:prstDash val="solid"/>
+                      <a:round/>
+                      <a:headEnd type="none" w="med" len="med"/>
+                      <a:tailEnd type="none" w="med" len="med"/>
+                    </a:lnL>
+                    <a:lnR w="12700" cap="flat" cmpd="sng" algn="ctr">
+                      <a:solidFill>
+                        <a:schemeClr val="tx1"/>
+                      </a:solidFill>
+                      <a:prstDash val="solid"/>
+                      <a:round/>
+                      <a:headEnd type="none" w="med" len="med"/>
+                      <a:tailEnd type="none" w="med" len="med"/>
+                    </a:lnR>
+                    <a:lnT w="12700" cap="flat" cmpd="sng" algn="ctr">
+                      <a:solidFill>
+                        <a:schemeClr val="tx1"/>
+                      </a:solidFill>
+                      <a:prstDash val="solid"/>
+                      <a:round/>
+                      <a:headEnd type="none" w="med" len="med"/>
+                      <a:tailEnd type="none" w="med" len="med"/>
+                    </a:lnT>
+                    <a:lnB w="12700" cap="flat" cmpd="sng" algn="ctr">
+                      <a:solidFill>
+                        <a:schemeClr val="tx1"/>
+                      </a:solidFill>
+                      <a:prstDash val="solid"/>
+                      <a:round/>
+                      <a:headEnd type="none" w="med" len="med"/>
+                      <a:tailEnd type="none" w="med" len="med"/>
+                    </a:lnB>
+                    <a:solidFill>
+                      <a:schemeClr val="bg1"/>
+                    </a:solidFill>
+                  </a:tcPr>
+                </a:tc>
+                <a:extLst>
+                  <a:ext uri="{0D108BD9-81ED-4DB2-BD59-A6C34878D82A}">
+                    <a16:rowId xmlns:a16="http://schemas.microsoft.com/office/drawing/2014/main" val="1168254549"/>
+                  </a:ext>
+                </a:extLst>
+              </a:tr>
+              <a:tr h="676738">
+                <a:tc>
+                  <a:txBody>
+                    <a:bodyPr/>
+                    <a:lstStyle/>
+                    <a:p>
+                      <a:endParaRPr kumimoji="1" lang="ja-JP" altLang="en-US" dirty="0"/>
+                    </a:p>
+                  </a:txBody>
+                  <a:tcPr>
+                    <a:lnL w="12700" cap="flat" cmpd="sng" algn="ctr">
+                      <a:solidFill>
+                        <a:schemeClr val="tx1"/>
+                      </a:solidFill>
+                      <a:prstDash val="solid"/>
+                      <a:round/>
+                      <a:headEnd type="none" w="med" len="med"/>
+                      <a:tailEnd type="none" w="med" len="med"/>
+                    </a:lnL>
+                    <a:lnR w="12700" cap="flat" cmpd="sng" algn="ctr">
+                      <a:solidFill>
+                        <a:schemeClr val="tx1"/>
+                      </a:solidFill>
+                      <a:prstDash val="solid"/>
+                      <a:round/>
+                      <a:headEnd type="none" w="med" len="med"/>
+                      <a:tailEnd type="none" w="med" len="med"/>
+                    </a:lnR>
+                    <a:lnT w="12700" cap="flat" cmpd="sng" algn="ctr">
+                      <a:solidFill>
+                        <a:schemeClr val="tx1"/>
+                      </a:solidFill>
+                      <a:prstDash val="solid"/>
+                      <a:round/>
+                      <a:headEnd type="none" w="med" len="med"/>
+                      <a:tailEnd type="none" w="med" len="med"/>
+                    </a:lnT>
+                    <a:lnB w="12700" cap="flat" cmpd="sng" algn="ctr">
+                      <a:solidFill>
+                        <a:schemeClr val="tx1"/>
+                      </a:solidFill>
+                      <a:prstDash val="solid"/>
+                      <a:round/>
+                      <a:headEnd type="none" w="med" len="med"/>
+                      <a:tailEnd type="none" w="med" len="med"/>
+                    </a:lnB>
+                    <a:solidFill>
+                      <a:schemeClr val="bg1"/>
+                    </a:solidFill>
+                  </a:tcPr>
+                </a:tc>
+                <a:tc>
+                  <a:txBody>
+                    <a:bodyPr/>
+                    <a:lstStyle/>
+                    <a:p>
+                      <a:endParaRPr kumimoji="1" lang="ja-JP" altLang="en-US" dirty="0"/>
+                    </a:p>
+                  </a:txBody>
+                  <a:tcPr>
+                    <a:lnL w="12700" cap="flat" cmpd="sng" algn="ctr">
+                      <a:solidFill>
+                        <a:schemeClr val="tx1"/>
+                      </a:solidFill>
+                      <a:prstDash val="solid"/>
+                      <a:round/>
+                      <a:headEnd type="none" w="med" len="med"/>
+                      <a:tailEnd type="none" w="med" len="med"/>
+                    </a:lnL>
+                    <a:lnR w="12700" cap="flat" cmpd="sng" algn="ctr">
+                      <a:solidFill>
+                        <a:schemeClr val="tx1"/>
+                      </a:solidFill>
+                      <a:prstDash val="solid"/>
+                      <a:round/>
+                      <a:headEnd type="none" w="med" len="med"/>
+                      <a:tailEnd type="none" w="med" len="med"/>
+                    </a:lnR>
+                    <a:lnT w="12700" cap="flat" cmpd="sng" algn="ctr">
+                      <a:solidFill>
+                        <a:schemeClr val="tx1"/>
+                      </a:solidFill>
+                      <a:prstDash val="solid"/>
+                      <a:round/>
+                      <a:headEnd type="none" w="med" len="med"/>
+                      <a:tailEnd type="none" w="med" len="med"/>
+                    </a:lnT>
+                    <a:lnB w="12700" cap="flat" cmpd="sng" algn="ctr">
+                      <a:solidFill>
+                        <a:schemeClr val="tx1"/>
+                      </a:solidFill>
+                      <a:prstDash val="solid"/>
+                      <a:round/>
+                      <a:headEnd type="none" w="med" len="med"/>
+                      <a:tailEnd type="none" w="med" len="med"/>
+                    </a:lnB>
+                    <a:solidFill>
+                      <a:schemeClr val="bg1"/>
+                    </a:solidFill>
+                  </a:tcPr>
+                </a:tc>
+                <a:extLst>
+                  <a:ext uri="{0D108BD9-81ED-4DB2-BD59-A6C34878D82A}">
+                    <a16:rowId xmlns:a16="http://schemas.microsoft.com/office/drawing/2014/main" val="3941317674"/>
+                  </a:ext>
+                </a:extLst>
+              </a:tr>
+              <a:tr h="676738">
+                <a:tc>
+                  <a:txBody>
+                    <a:bodyPr/>
+                    <a:lstStyle/>
+                    <a:p>
+                      <a:endParaRPr kumimoji="1" lang="ja-JP" altLang="en-US" dirty="0"/>
+                    </a:p>
+                  </a:txBody>
+                  <a:tcPr>
+                    <a:lnL w="12700" cap="flat" cmpd="sng" algn="ctr">
+                      <a:solidFill>
+                        <a:schemeClr val="tx1"/>
+                      </a:solidFill>
+                      <a:prstDash val="solid"/>
+                      <a:round/>
+                      <a:headEnd type="none" w="med" len="med"/>
+                      <a:tailEnd type="none" w="med" len="med"/>
+                    </a:lnL>
+                    <a:lnR w="12700" cap="flat" cmpd="sng" algn="ctr">
+                      <a:solidFill>
+                        <a:schemeClr val="tx1"/>
+                      </a:solidFill>
+                      <a:prstDash val="solid"/>
+                      <a:round/>
+                      <a:headEnd type="none" w="med" len="med"/>
+                      <a:tailEnd type="none" w="med" len="med"/>
+                    </a:lnR>
+                    <a:lnT w="12700" cap="flat" cmpd="sng" algn="ctr">
+                      <a:solidFill>
+                        <a:schemeClr val="tx1"/>
+                      </a:solidFill>
+                      <a:prstDash val="solid"/>
+                      <a:round/>
+                      <a:headEnd type="none" w="med" len="med"/>
+                      <a:tailEnd type="none" w="med" len="med"/>
+                    </a:lnT>
+                    <a:lnB w="12700" cap="flat" cmpd="sng" algn="ctr">
+                      <a:solidFill>
+                        <a:schemeClr val="tx1"/>
+                      </a:solidFill>
+                      <a:prstDash val="solid"/>
+                      <a:round/>
+                      <a:headEnd type="none" w="med" len="med"/>
+                      <a:tailEnd type="none" w="med" len="med"/>
+                    </a:lnB>
+                    <a:solidFill>
+                      <a:schemeClr val="bg1"/>
+                    </a:solidFill>
+                  </a:tcPr>
+                </a:tc>
+                <a:tc>
+                  <a:txBody>
+                    <a:bodyPr/>
+                    <a:lstStyle/>
+                    <a:p>
+                      <a:endParaRPr kumimoji="1" lang="ja-JP" altLang="en-US" dirty="0"/>
+                    </a:p>
+                  </a:txBody>
+                  <a:tcPr>
+                    <a:lnL w="12700" cap="flat" cmpd="sng" algn="ctr">
+                      <a:solidFill>
+                        <a:schemeClr val="tx1"/>
+                      </a:solidFill>
+                      <a:prstDash val="solid"/>
+                      <a:round/>
+                      <a:headEnd type="none" w="med" len="med"/>
+                      <a:tailEnd type="none" w="med" len="med"/>
+                    </a:lnL>
+                    <a:lnR w="12700" cap="flat" cmpd="sng" algn="ctr">
+                      <a:solidFill>
+                        <a:schemeClr val="tx1"/>
+                      </a:solidFill>
+                      <a:prstDash val="solid"/>
+                      <a:round/>
+                      <a:headEnd type="none" w="med" len="med"/>
+                      <a:tailEnd type="none" w="med" len="med"/>
+                    </a:lnR>
+                    <a:lnT w="12700" cap="flat" cmpd="sng" algn="ctr">
+                      <a:solidFill>
+                        <a:schemeClr val="tx1"/>
+                      </a:solidFill>
+                      <a:prstDash val="solid"/>
+                      <a:round/>
+                      <a:headEnd type="none" w="med" len="med"/>
+                      <a:tailEnd type="none" w="med" len="med"/>
+                    </a:lnT>
+                    <a:lnB w="12700" cap="flat" cmpd="sng" algn="ctr">
+                      <a:solidFill>
+                        <a:schemeClr val="tx1"/>
+                      </a:solidFill>
+                      <a:prstDash val="solid"/>
+                      <a:round/>
+                      <a:headEnd type="none" w="med" len="med"/>
+                      <a:tailEnd type="none" w="med" len="med"/>
+                    </a:lnB>
+                    <a:solidFill>
+                      <a:schemeClr val="bg1"/>
+                    </a:solidFill>
+                  </a:tcPr>
+                </a:tc>
+                <a:extLst>
+                  <a:ext uri="{0D108BD9-81ED-4DB2-BD59-A6C34878D82A}">
+                    <a16:rowId xmlns:a16="http://schemas.microsoft.com/office/drawing/2014/main" val="4241612204"/>
+                  </a:ext>
+                </a:extLst>
+              </a:tr>
+              <a:tr h="676738">
+                <a:tc>
+                  <a:txBody>
+                    <a:bodyPr/>
+                    <a:lstStyle/>
+                    <a:p>
+                      <a:endParaRPr kumimoji="1" lang="ja-JP" altLang="en-US"/>
+                    </a:p>
+                  </a:txBody>
+                  <a:tcPr>
+                    <a:lnL w="12700" cap="flat" cmpd="sng" algn="ctr">
+                      <a:solidFill>
+                        <a:schemeClr val="tx1"/>
+                      </a:solidFill>
+                      <a:prstDash val="solid"/>
+                      <a:round/>
+                      <a:headEnd type="none" w="med" len="med"/>
+                      <a:tailEnd type="none" w="med" len="med"/>
+                    </a:lnL>
+                    <a:lnR w="12700" cap="flat" cmpd="sng" algn="ctr">
+                      <a:solidFill>
+                        <a:schemeClr val="tx1"/>
+                      </a:solidFill>
+                      <a:prstDash val="solid"/>
+                      <a:round/>
+                      <a:headEnd type="none" w="med" len="med"/>
+                      <a:tailEnd type="none" w="med" len="med"/>
+                    </a:lnR>
+                    <a:lnT w="12700" cap="flat" cmpd="sng" algn="ctr">
+                      <a:solidFill>
+                        <a:schemeClr val="tx1"/>
+                      </a:solidFill>
+                      <a:prstDash val="solid"/>
+                      <a:round/>
+                      <a:headEnd type="none" w="med" len="med"/>
+                      <a:tailEnd type="none" w="med" len="med"/>
+                    </a:lnT>
+                    <a:lnB w="12700" cap="flat" cmpd="sng" algn="ctr">
+                      <a:solidFill>
+                        <a:schemeClr val="tx1"/>
+                      </a:solidFill>
+                      <a:prstDash val="solid"/>
+                      <a:round/>
+                      <a:headEnd type="none" w="med" len="med"/>
+                      <a:tailEnd type="none" w="med" len="med"/>
+                    </a:lnB>
+                    <a:solidFill>
+                      <a:schemeClr val="bg1"/>
+                    </a:solidFill>
+                  </a:tcPr>
+                </a:tc>
+                <a:tc>
+                  <a:txBody>
+                    <a:bodyPr/>
+                    <a:lstStyle/>
+                    <a:p>
+                      <a:endParaRPr kumimoji="1" lang="ja-JP" altLang="en-US" dirty="0"/>
+                    </a:p>
+                  </a:txBody>
+                  <a:tcPr>
+                    <a:lnL w="12700" cap="flat" cmpd="sng" algn="ctr">
+                      <a:solidFill>
+                        <a:schemeClr val="tx1"/>
+                      </a:solidFill>
+                      <a:prstDash val="solid"/>
+                      <a:round/>
+                      <a:headEnd type="none" w="med" len="med"/>
+                      <a:tailEnd type="none" w="med" len="med"/>
+                    </a:lnL>
+                    <a:lnR w="12700" cap="flat" cmpd="sng" algn="ctr">
+                      <a:solidFill>
+                        <a:schemeClr val="tx1"/>
+                      </a:solidFill>
+                      <a:prstDash val="solid"/>
+                      <a:round/>
+                      <a:headEnd type="none" w="med" len="med"/>
+                      <a:tailEnd type="none" w="med" len="med"/>
+                    </a:lnR>
+                    <a:lnT w="12700" cap="flat" cmpd="sng" algn="ctr">
+                      <a:solidFill>
+                        <a:schemeClr val="tx1"/>
+                      </a:solidFill>
+                      <a:prstDash val="solid"/>
+                      <a:round/>
+                      <a:headEnd type="none" w="med" len="med"/>
+                      <a:tailEnd type="none" w="med" len="med"/>
+                    </a:lnT>
+                    <a:lnB w="12700" cap="flat" cmpd="sng" algn="ctr">
+                      <a:solidFill>
+                        <a:schemeClr val="tx1"/>
+                      </a:solidFill>
+                      <a:prstDash val="solid"/>
+                      <a:round/>
+                      <a:headEnd type="none" w="med" len="med"/>
+                      <a:tailEnd type="none" w="med" len="med"/>
+                    </a:lnB>
+                    <a:solidFill>
+                      <a:schemeClr val="bg1"/>
+                    </a:solidFill>
+                  </a:tcPr>
+                </a:tc>
+                <a:extLst>
+                  <a:ext uri="{0D108BD9-81ED-4DB2-BD59-A6C34878D82A}">
+                    <a16:rowId xmlns:a16="http://schemas.microsoft.com/office/drawing/2014/main" val="2405261173"/>
+                  </a:ext>
+                </a:extLst>
+              </a:tr>
+              <a:tr h="676738">
+                <a:tc>
+                  <a:txBody>
+                    <a:bodyPr/>
+                    <a:lstStyle/>
+                    <a:p>
+                      <a:endParaRPr kumimoji="1" lang="ja-JP" altLang="en-US"/>
+                    </a:p>
+                  </a:txBody>
+                  <a:tcPr>
+                    <a:lnL w="12700" cap="flat" cmpd="sng" algn="ctr">
+                      <a:solidFill>
+                        <a:schemeClr val="tx1"/>
+                      </a:solidFill>
+                      <a:prstDash val="solid"/>
+                      <a:round/>
+                      <a:headEnd type="none" w="med" len="med"/>
+                      <a:tailEnd type="none" w="med" len="med"/>
+                    </a:lnL>
+                    <a:lnR w="12700" cap="flat" cmpd="sng" algn="ctr">
+                      <a:solidFill>
+                        <a:schemeClr val="tx1"/>
+                      </a:solidFill>
+                      <a:prstDash val="solid"/>
+                      <a:round/>
+                      <a:headEnd type="none" w="med" len="med"/>
+                      <a:tailEnd type="none" w="med" len="med"/>
+                    </a:lnR>
+                    <a:lnT w="12700" cap="flat" cmpd="sng" algn="ctr">
+                      <a:solidFill>
+                        <a:schemeClr val="tx1"/>
+                      </a:solidFill>
+                      <a:prstDash val="solid"/>
+                      <a:round/>
+                      <a:headEnd type="none" w="med" len="med"/>
+                      <a:tailEnd type="none" w="med" len="med"/>
+                    </a:lnT>
+                    <a:lnB w="12700" cap="flat" cmpd="sng" algn="ctr">
+                      <a:solidFill>
+                        <a:schemeClr val="tx1"/>
+                      </a:solidFill>
+                      <a:prstDash val="solid"/>
+                      <a:round/>
+                      <a:headEnd type="none" w="med" len="med"/>
+                      <a:tailEnd type="none" w="med" len="med"/>
+                    </a:lnB>
+                    <a:solidFill>
+                      <a:schemeClr val="bg1"/>
+                    </a:solidFill>
+                  </a:tcPr>
+                </a:tc>
+                <a:tc>
+                  <a:txBody>
+                    <a:bodyPr/>
+                    <a:lstStyle/>
+                    <a:p>
+                      <a:endParaRPr kumimoji="1" lang="ja-JP" altLang="en-US" dirty="0"/>
+                    </a:p>
+                  </a:txBody>
+                  <a:tcPr>
+                    <a:lnL w="12700" cap="flat" cmpd="sng" algn="ctr">
+                      <a:solidFill>
+                        <a:schemeClr val="tx1"/>
+                      </a:solidFill>
+                      <a:prstDash val="solid"/>
+                      <a:round/>
+                      <a:headEnd type="none" w="med" len="med"/>
+                      <a:tailEnd type="none" w="med" len="med"/>
+                    </a:lnL>
+                    <a:lnR w="12700" cap="flat" cmpd="sng" algn="ctr">
+                      <a:solidFill>
+                        <a:schemeClr val="tx1"/>
+                      </a:solidFill>
+                      <a:prstDash val="solid"/>
+                      <a:round/>
+                      <a:headEnd type="none" w="med" len="med"/>
+                      <a:tailEnd type="none" w="med" len="med"/>
+                    </a:lnR>
+                    <a:lnT w="12700" cap="flat" cmpd="sng" algn="ctr">
+                      <a:solidFill>
+                        <a:schemeClr val="tx1"/>
+                      </a:solidFill>
+                      <a:prstDash val="solid"/>
+                      <a:round/>
+                      <a:headEnd type="none" w="med" len="med"/>
+                      <a:tailEnd type="none" w="med" len="med"/>
+                    </a:lnT>
+                    <a:lnB w="12700" cap="flat" cmpd="sng" algn="ctr">
+                      <a:solidFill>
+                        <a:schemeClr val="tx1"/>
+                      </a:solidFill>
+                      <a:prstDash val="solid"/>
+                      <a:round/>
+                      <a:headEnd type="none" w="med" len="med"/>
+                      <a:tailEnd type="none" w="med" len="med"/>
+                    </a:lnB>
+                    <a:solidFill>
+                      <a:schemeClr val="bg1"/>
+                    </a:solidFill>
+                  </a:tcPr>
+                </a:tc>
+                <a:extLst>
+                  <a:ext uri="{0D108BD9-81ED-4DB2-BD59-A6C34878D82A}">
+                    <a16:rowId xmlns:a16="http://schemas.microsoft.com/office/drawing/2014/main" val="3318169012"/>
+                  </a:ext>
+                </a:extLst>
+              </a:tr>
+              <a:tr h="676738">
+                <a:tc>
+                  <a:txBody>
+                    <a:bodyPr/>
+                    <a:lstStyle/>
+                    <a:p>
+                      <a:endParaRPr kumimoji="1" lang="ja-JP" altLang="en-US"/>
+                    </a:p>
+                  </a:txBody>
+                  <a:tcPr>
+                    <a:lnL w="12700" cap="flat" cmpd="sng" algn="ctr">
+                      <a:solidFill>
+                        <a:schemeClr val="tx1"/>
+                      </a:solidFill>
+                      <a:prstDash val="solid"/>
+                      <a:round/>
+                      <a:headEnd type="none" w="med" len="med"/>
+                      <a:tailEnd type="none" w="med" len="med"/>
+                    </a:lnL>
+                    <a:lnR w="12700" cap="flat" cmpd="sng" algn="ctr">
+                      <a:solidFill>
+                        <a:schemeClr val="tx1"/>
+                      </a:solidFill>
+                      <a:prstDash val="solid"/>
+                      <a:round/>
+                      <a:headEnd type="none" w="med" len="med"/>
+                      <a:tailEnd type="none" w="med" len="med"/>
+                    </a:lnR>
+                    <a:lnT w="12700" cap="flat" cmpd="sng" algn="ctr">
+                      <a:solidFill>
+                        <a:schemeClr val="tx1"/>
+                      </a:solidFill>
+                      <a:prstDash val="solid"/>
+                      <a:round/>
+                      <a:headEnd type="none" w="med" len="med"/>
+                      <a:tailEnd type="none" w="med" len="med"/>
+                    </a:lnT>
+                    <a:lnB w="12700" cap="flat" cmpd="sng" algn="ctr">
+                      <a:solidFill>
+                        <a:schemeClr val="tx1"/>
+                      </a:solidFill>
+                      <a:prstDash val="solid"/>
+                      <a:round/>
+                      <a:headEnd type="none" w="med" len="med"/>
+                      <a:tailEnd type="none" w="med" len="med"/>
+                    </a:lnB>
+                    <a:solidFill>
+                      <a:schemeClr val="bg1"/>
+                    </a:solidFill>
+                  </a:tcPr>
+                </a:tc>
+                <a:tc>
+                  <a:txBody>
+                    <a:bodyPr/>
+                    <a:lstStyle/>
+                    <a:p>
+                      <a:endParaRPr kumimoji="1" lang="ja-JP" altLang="en-US" dirty="0"/>
+                    </a:p>
+                  </a:txBody>
+                  <a:tcPr>
+                    <a:lnL w="12700" cap="flat" cmpd="sng" algn="ctr">
+                      <a:solidFill>
+                        <a:schemeClr val="tx1"/>
+                      </a:solidFill>
+                      <a:prstDash val="solid"/>
+                      <a:round/>
+                      <a:headEnd type="none" w="med" len="med"/>
+                      <a:tailEnd type="none" w="med" len="med"/>
+                    </a:lnL>
+                    <a:lnR w="12700" cap="flat" cmpd="sng" algn="ctr">
+                      <a:solidFill>
+                        <a:schemeClr val="tx1"/>
+                      </a:solidFill>
+                      <a:prstDash val="solid"/>
+                      <a:round/>
+                      <a:headEnd type="none" w="med" len="med"/>
+                      <a:tailEnd type="none" w="med" len="med"/>
+                    </a:lnR>
+                    <a:lnT w="12700" cap="flat" cmpd="sng" algn="ctr">
+                      <a:solidFill>
+                        <a:schemeClr val="tx1"/>
+                      </a:solidFill>
+                      <a:prstDash val="solid"/>
+                      <a:round/>
+                      <a:headEnd type="none" w="med" len="med"/>
+                      <a:tailEnd type="none" w="med" len="med"/>
+                    </a:lnT>
+                    <a:lnB w="12700" cap="flat" cmpd="sng" algn="ctr">
+                      <a:solidFill>
+                        <a:schemeClr val="tx1"/>
+                      </a:solidFill>
+                      <a:prstDash val="solid"/>
+                      <a:round/>
+                      <a:headEnd type="none" w="med" len="med"/>
+                      <a:tailEnd type="none" w="med" len="med"/>
+                    </a:lnB>
+                    <a:solidFill>
+                      <a:schemeClr val="bg1"/>
+                    </a:solidFill>
+                  </a:tcPr>
+                </a:tc>
+                <a:extLst>
+                  <a:ext uri="{0D108BD9-81ED-4DB2-BD59-A6C34878D82A}">
+                    <a16:rowId xmlns:a16="http://schemas.microsoft.com/office/drawing/2014/main" val="3154491127"/>
+                  </a:ext>
+                </a:extLst>
+              </a:tr>
+              <a:tr h="676738">
+                <a:tc>
+                  <a:txBody>
+                    <a:bodyPr/>
+                    <a:lstStyle/>
+                    <a:p>
+                      <a:endParaRPr kumimoji="1" lang="ja-JP" altLang="en-US"/>
+                    </a:p>
+                  </a:txBody>
+                  <a:tcPr>
+                    <a:lnL w="12700" cap="flat" cmpd="sng" algn="ctr">
+                      <a:solidFill>
+                        <a:schemeClr val="tx1"/>
+                      </a:solidFill>
+                      <a:prstDash val="solid"/>
+                      <a:round/>
+                      <a:headEnd type="none" w="med" len="med"/>
+                      <a:tailEnd type="none" w="med" len="med"/>
+                    </a:lnL>
+                    <a:lnR w="12700" cap="flat" cmpd="sng" algn="ctr">
+                      <a:solidFill>
+                        <a:schemeClr val="tx1"/>
+                      </a:solidFill>
+                      <a:prstDash val="solid"/>
+                      <a:round/>
+                      <a:headEnd type="none" w="med" len="med"/>
+                      <a:tailEnd type="none" w="med" len="med"/>
+                    </a:lnR>
+                    <a:lnT w="12700" cap="flat" cmpd="sng" algn="ctr">
+                      <a:solidFill>
+                        <a:schemeClr val="tx1"/>
+                      </a:solidFill>
+                      <a:prstDash val="solid"/>
+                      <a:round/>
+                      <a:headEnd type="none" w="med" len="med"/>
+                      <a:tailEnd type="none" w="med" len="med"/>
+                    </a:lnT>
+                    <a:lnB w="12700" cap="flat" cmpd="sng" algn="ctr">
+                      <a:solidFill>
+                        <a:schemeClr val="tx1"/>
+                      </a:solidFill>
+                      <a:prstDash val="solid"/>
+                      <a:round/>
+                      <a:headEnd type="none" w="med" len="med"/>
+                      <a:tailEnd type="none" w="med" len="med"/>
+                    </a:lnB>
+                    <a:solidFill>
+                      <a:schemeClr val="bg1"/>
+                    </a:solidFill>
+                  </a:tcPr>
+                </a:tc>
+                <a:tc>
+                  <a:txBody>
+                    <a:bodyPr/>
+                    <a:lstStyle/>
+                    <a:p>
+                      <a:endParaRPr kumimoji="1" lang="ja-JP" altLang="en-US" dirty="0"/>
+                    </a:p>
+                  </a:txBody>
+                  <a:tcPr>
+                    <a:lnL w="12700" cap="flat" cmpd="sng" algn="ctr">
+                      <a:solidFill>
+                        <a:schemeClr val="tx1"/>
+                      </a:solidFill>
+                      <a:prstDash val="solid"/>
+                      <a:round/>
+                      <a:headEnd type="none" w="med" len="med"/>
+                      <a:tailEnd type="none" w="med" len="med"/>
+                    </a:lnL>
+                    <a:lnR w="12700" cap="flat" cmpd="sng" algn="ctr">
+                      <a:solidFill>
+                        <a:schemeClr val="tx1"/>
+                      </a:solidFill>
+                      <a:prstDash val="solid"/>
+                      <a:round/>
+                      <a:headEnd type="none" w="med" len="med"/>
+                      <a:tailEnd type="none" w="med" len="med"/>
+                    </a:lnR>
+                    <a:lnT w="12700" cap="flat" cmpd="sng" algn="ctr">
+                      <a:solidFill>
+                        <a:schemeClr val="tx1"/>
+                      </a:solidFill>
+                      <a:prstDash val="solid"/>
+                      <a:round/>
+                      <a:headEnd type="none" w="med" len="med"/>
+                      <a:tailEnd type="none" w="med" len="med"/>
+                    </a:lnT>
+                    <a:lnB w="12700" cap="flat" cmpd="sng" algn="ctr">
+                      <a:solidFill>
+                        <a:schemeClr val="tx1"/>
+                      </a:solidFill>
+                      <a:prstDash val="solid"/>
+                      <a:round/>
+                      <a:headEnd type="none" w="med" len="med"/>
+                      <a:tailEnd type="none" w="med" len="med"/>
+                    </a:lnB>
+                    <a:solidFill>
+                      <a:schemeClr val="bg1"/>
+                    </a:solidFill>
+                  </a:tcPr>
+                </a:tc>
+                <a:extLst>
+                  <a:ext uri="{0D108BD9-81ED-4DB2-BD59-A6C34878D82A}">
+                    <a16:rowId xmlns:a16="http://schemas.microsoft.com/office/drawing/2014/main" val="729686559"/>
+                  </a:ext>
+                </a:extLst>
+              </a:tr>
+              <a:tr h="676738">
+                <a:tc>
+                  <a:txBody>
+                    <a:bodyPr/>
+                    <a:lstStyle/>
+                    <a:p>
+                      <a:endParaRPr kumimoji="1" lang="ja-JP" altLang="en-US"/>
+                    </a:p>
+                  </a:txBody>
+                  <a:tcPr>
+                    <a:lnL w="12700" cap="flat" cmpd="sng" algn="ctr">
+                      <a:solidFill>
+                        <a:schemeClr val="tx1"/>
+                      </a:solidFill>
+                      <a:prstDash val="solid"/>
+                      <a:round/>
+                      <a:headEnd type="none" w="med" len="med"/>
+                      <a:tailEnd type="none" w="med" len="med"/>
+                    </a:lnL>
+                    <a:lnR w="12700" cap="flat" cmpd="sng" algn="ctr">
+                      <a:solidFill>
+                        <a:schemeClr val="tx1"/>
+                      </a:solidFill>
+                      <a:prstDash val="solid"/>
+                      <a:round/>
+                      <a:headEnd type="none" w="med" len="med"/>
+                      <a:tailEnd type="none" w="med" len="med"/>
+                    </a:lnR>
+                    <a:lnT w="12700" cap="flat" cmpd="sng" algn="ctr">
+                      <a:solidFill>
+                        <a:schemeClr val="tx1"/>
+                      </a:solidFill>
+                      <a:prstDash val="solid"/>
+                      <a:round/>
+                      <a:headEnd type="none" w="med" len="med"/>
+                      <a:tailEnd type="none" w="med" len="med"/>
+                    </a:lnT>
+                    <a:lnB w="12700" cap="flat" cmpd="sng" algn="ctr">
+                      <a:solidFill>
+                        <a:schemeClr val="tx1"/>
+                      </a:solidFill>
+                      <a:prstDash val="solid"/>
+                      <a:round/>
+                      <a:headEnd type="none" w="med" len="med"/>
+                      <a:tailEnd type="none" w="med" len="med"/>
+                    </a:lnB>
+                    <a:solidFill>
+                      <a:schemeClr val="bg1"/>
+                    </a:solidFill>
+                  </a:tcPr>
+                </a:tc>
+                <a:tc>
+                  <a:txBody>
+                    <a:bodyPr/>
+                    <a:lstStyle/>
+                    <a:p>
+                      <a:endParaRPr kumimoji="1" lang="ja-JP" altLang="en-US" dirty="0"/>
+                    </a:p>
+                  </a:txBody>
+                  <a:tcPr>
+                    <a:lnL w="12700" cap="flat" cmpd="sng" algn="ctr">
+                      <a:solidFill>
+                        <a:schemeClr val="tx1"/>
+                      </a:solidFill>
+                      <a:prstDash val="solid"/>
+                      <a:round/>
+                      <a:headEnd type="none" w="med" len="med"/>
+                      <a:tailEnd type="none" w="med" len="med"/>
+                    </a:lnL>
+                    <a:lnR w="12700" cap="flat" cmpd="sng" algn="ctr">
+                      <a:solidFill>
+                        <a:schemeClr val="tx1"/>
+                      </a:solidFill>
+                      <a:prstDash val="solid"/>
+                      <a:round/>
+                      <a:headEnd type="none" w="med" len="med"/>
+                      <a:tailEnd type="none" w="med" len="med"/>
+                    </a:lnR>
+                    <a:lnT w="12700" cap="flat" cmpd="sng" algn="ctr">
+                      <a:solidFill>
+                        <a:schemeClr val="tx1"/>
+                      </a:solidFill>
+                      <a:prstDash val="solid"/>
+                      <a:round/>
+                      <a:headEnd type="none" w="med" len="med"/>
+                      <a:tailEnd type="none" w="med" len="med"/>
+                    </a:lnT>
+                    <a:lnB w="12700" cap="flat" cmpd="sng" algn="ctr">
+                      <a:solidFill>
+                        <a:schemeClr val="tx1"/>
+                      </a:solidFill>
+                      <a:prstDash val="solid"/>
+                      <a:round/>
+                      <a:headEnd type="none" w="med" len="med"/>
+                      <a:tailEnd type="none" w="med" len="med"/>
+                    </a:lnB>
+                    <a:solidFill>
+                      <a:schemeClr val="bg1"/>
+                    </a:solidFill>
+                  </a:tcPr>
+                </a:tc>
+                <a:extLst>
+                  <a:ext uri="{0D108BD9-81ED-4DB2-BD59-A6C34878D82A}">
+                    <a16:rowId xmlns:a16="http://schemas.microsoft.com/office/drawing/2014/main" val="24195793"/>
+                  </a:ext>
+                </a:extLst>
+              </a:tr>
+              <a:tr h="676738">
+                <a:tc>
+                  <a:txBody>
+                    <a:bodyPr/>
+                    <a:lstStyle/>
+                    <a:p>
+                      <a:endParaRPr kumimoji="1" lang="ja-JP" altLang="en-US" dirty="0"/>
+                    </a:p>
+                  </a:txBody>
+                  <a:tcPr>
+                    <a:lnL w="12700" cap="flat" cmpd="sng" algn="ctr">
+                      <a:solidFill>
+                        <a:schemeClr val="tx1"/>
+                      </a:solidFill>
+                      <a:prstDash val="solid"/>
+                      <a:round/>
+                      <a:headEnd type="none" w="med" len="med"/>
+                      <a:tailEnd type="none" w="med" len="med"/>
+                    </a:lnL>
+                    <a:lnR w="12700" cap="flat" cmpd="sng" algn="ctr">
+                      <a:solidFill>
+                        <a:schemeClr val="tx1"/>
+                      </a:solidFill>
+                      <a:prstDash val="solid"/>
+                      <a:round/>
+                      <a:headEnd type="none" w="med" len="med"/>
+                      <a:tailEnd type="none" w="med" len="med"/>
+                    </a:lnR>
+                    <a:lnT w="12700" cap="flat" cmpd="sng" algn="ctr">
+                      <a:solidFill>
+                        <a:schemeClr val="tx1"/>
+                      </a:solidFill>
+                      <a:prstDash val="solid"/>
+                      <a:round/>
+                      <a:headEnd type="none" w="med" len="med"/>
+                      <a:tailEnd type="none" w="med" len="med"/>
+                    </a:lnT>
+                    <a:lnB w="12700" cap="flat" cmpd="sng" algn="ctr">
+                      <a:solidFill>
+                        <a:schemeClr val="tx1"/>
+                      </a:solidFill>
+                      <a:prstDash val="solid"/>
+                      <a:round/>
+                      <a:headEnd type="none" w="med" len="med"/>
+                      <a:tailEnd type="none" w="med" len="med"/>
+                    </a:lnB>
+                    <a:solidFill>
+                      <a:schemeClr val="bg1"/>
+                    </a:solidFill>
+                  </a:tcPr>
+                </a:tc>
+                <a:tc>
+                  <a:txBody>
+                    <a:bodyPr/>
+                    <a:lstStyle/>
+                    <a:p>
+                      <a:endParaRPr kumimoji="1" lang="ja-JP" altLang="en-US" dirty="0"/>
+                    </a:p>
+                  </a:txBody>
+                  <a:tcPr>
+                    <a:lnL w="12700" cap="flat" cmpd="sng" algn="ctr">
+                      <a:solidFill>
+                        <a:schemeClr val="tx1"/>
+                      </a:solidFill>
+                      <a:prstDash val="solid"/>
+                      <a:round/>
+                      <a:headEnd type="none" w="med" len="med"/>
+                      <a:tailEnd type="none" w="med" len="med"/>
+                    </a:lnL>
+                    <a:lnR w="12700" cap="flat" cmpd="sng" algn="ctr">
+                      <a:solidFill>
+                        <a:schemeClr val="tx1"/>
+                      </a:solidFill>
+                      <a:prstDash val="solid"/>
+                      <a:round/>
+                      <a:headEnd type="none" w="med" len="med"/>
+                      <a:tailEnd type="none" w="med" len="med"/>
+                    </a:lnR>
+                    <a:lnT w="12700" cap="flat" cmpd="sng" algn="ctr">
+                      <a:solidFill>
+                        <a:schemeClr val="tx1"/>
+                      </a:solidFill>
+                      <a:prstDash val="solid"/>
+                      <a:round/>
+                      <a:headEnd type="none" w="med" len="med"/>
+                      <a:tailEnd type="none" w="med" len="med"/>
+                    </a:lnT>
+                    <a:lnB w="12700" cap="flat" cmpd="sng" algn="ctr">
+                      <a:solidFill>
+                        <a:schemeClr val="tx1"/>
+                      </a:solidFill>
+                      <a:prstDash val="solid"/>
+                      <a:round/>
+                      <a:headEnd type="none" w="med" len="med"/>
+                      <a:tailEnd type="none" w="med" len="med"/>
+                    </a:lnB>
+                    <a:solidFill>
+                      <a:schemeClr val="bg1"/>
+                    </a:solidFill>
+                  </a:tcPr>
+                </a:tc>
+                <a:extLst>
+                  <a:ext uri="{0D108BD9-81ED-4DB2-BD59-A6C34878D82A}">
+                    <a16:rowId xmlns:a16="http://schemas.microsoft.com/office/drawing/2014/main" val="436517883"/>
+                  </a:ext>
+                </a:extLst>
+              </a:tr>
+            </a:tbl>
+          </a:graphicData>
+        </a:graphic>
+      </p:graphicFrame>
+      <p:sp>
+        <p:nvSpPr>
+          <p:cNvPr id="8" name="テキスト ボックス 7">
+            <a:extLst>
+              <a:ext uri="{FF2B5EF4-FFF2-40B4-BE49-F238E27FC236}">
+                <a16:creationId xmlns:a16="http://schemas.microsoft.com/office/drawing/2014/main" id="{7C354F92-43E1-80BC-85EA-6CF550D7BC24}"/>
+              </a:ext>
+            </a:extLst>
+          </p:cNvPr>
+          <p:cNvSpPr txBox="1"/>
+          <p:nvPr/>
+        </p:nvSpPr>
+        <p:spPr>
+          <a:xfrm>
+            <a:off x="2795192" y="9940"/>
+            <a:ext cx="461665" cy="1859301"/>
+          </a:xfrm>
+          <a:prstGeom prst="rect">
+            <a:avLst/>
+          </a:prstGeom>
+          <a:noFill/>
+        </p:spPr>
+        <p:txBody>
+          <a:bodyPr vert="eaVert" wrap="square" rtlCol="0">
+            <a:spAutoFit/>
+          </a:bodyPr>
+          <a:lstStyle/>
+          <a:p>
+            <a:r>
+              <a:rPr kumimoji="1" lang="ja-JP" altLang="en-US" dirty="0"/>
+              <a:t>やりなおし</a:t>
+            </a:r>
+          </a:p>
+        </p:txBody>
+      </p:sp>
     </p:spTree>
     <p:extLst>
       <p:ext uri="{BB962C8B-B14F-4D97-AF65-F5344CB8AC3E}">
